--- a/raws/画图.pptx
+++ b/raws/画图.pptx
@@ -8967,836 +8967,951 @@
         <p:nvPr/>
       </p:nvGrpSpPr>
       <p:grpSpPr/>
-      <p:sp>
-        <p:nvSpPr>
-          <p:cNvPr id="11" name="文本框 10"/>
+      <p:graphicFrame>
+        <p:nvGraphicFramePr>
+          <p:cNvPr id="3" name="表格 2"/>
+          <p:cNvGraphicFramePr/>
+          <p:nvPr>
+            <p:custDataLst>
+              <p:tags r:id="rId1"/>
+            </p:custDataLst>
+          </p:nvPr>
+        </p:nvGraphicFramePr>
+        <p:xfrm>
+          <a:off x="2028190" y="400685"/>
+          <a:ext cx="2419350" cy="731520"/>
+        </p:xfrm>
+        <a:graphic>
+          <a:graphicData uri="http://schemas.openxmlformats.org/drawingml/2006/table">
+            <a:tbl>
+              <a:tblPr firstRow="1" bandRow="1">
+                <a:tableStyleId>{5C22544A-7EE6-4342-B048-85BDC9FD1C3A}</a:tableStyleId>
+              </a:tblPr>
+              <a:tblGrid>
+                <a:gridCol w="483870"/>
+                <a:gridCol w="483870"/>
+                <a:gridCol w="483870"/>
+                <a:gridCol w="483870"/>
+                <a:gridCol w="483870"/>
+              </a:tblGrid>
+              <a:tr h="243840">
+                <a:tc>
+                  <a:txBody>
+                    <a:bodyPr/>
+                    <a:p>
+                      <a:pPr algn="ctr">
+                        <a:buNone/>
+                      </a:pPr>
+                      <a:r>
+                        <a:rPr lang="zh-CN" altLang="en-US" sz="1000" b="0">
+                          <a:solidFill>
+                            <a:schemeClr val="tx1"/>
+                          </a:solidFill>
+                          <a:latin typeface="微软雅黑" panose="020B0503020204020204" charset="-122"/>
+                          <a:ea typeface="微软雅黑" panose="020B0503020204020204" charset="-122"/>
+                        </a:rPr>
+                        <a:t>你好</a:t>
+                      </a:r>
+                      <a:endParaRPr lang="zh-CN" altLang="en-US" sz="1000" b="0">
+                        <a:solidFill>
+                          <a:schemeClr val="tx1"/>
+                        </a:solidFill>
+                        <a:latin typeface="微软雅黑" panose="020B0503020204020204" charset="-122"/>
+                        <a:ea typeface="微软雅黑" panose="020B0503020204020204" charset="-122"/>
+                      </a:endParaRPr>
+                    </a:p>
+                  </a:txBody>
+                  <a:tcPr anchor="ctr" anchorCtr="0">
+                    <a:lnL w="12700" cmpd="sng">
+                      <a:solidFill>
+                        <a:schemeClr val="tx1"/>
+                      </a:solidFill>
+                      <a:prstDash val="solid"/>
+                    </a:lnL>
+                    <a:lnR w="12700" cmpd="sng">
+                      <a:solidFill>
+                        <a:schemeClr val="tx1"/>
+                      </a:solidFill>
+                      <a:prstDash val="solid"/>
+                    </a:lnR>
+                    <a:lnT w="12700" cmpd="sng">
+                      <a:solidFill>
+                        <a:schemeClr val="tx1"/>
+                      </a:solidFill>
+                      <a:prstDash val="solid"/>
+                    </a:lnT>
+                    <a:lnB w="12700" cmpd="sng">
+                      <a:solidFill>
+                        <a:schemeClr val="tx1"/>
+                      </a:solidFill>
+                      <a:prstDash val="solid"/>
+                    </a:lnB>
+                    <a:noFill/>
+                  </a:tcPr>
+                </a:tc>
+                <a:tc>
+                  <a:txBody>
+                    <a:bodyPr/>
+                    <a:p>
+                      <a:pPr algn="ctr">
+                        <a:buNone/>
+                      </a:pPr>
+                      <a:r>
+                        <a:rPr lang="zh-CN" altLang="en-US" sz="1000" b="0">
+                          <a:solidFill>
+                            <a:schemeClr val="tx1"/>
+                          </a:solidFill>
+                          <a:latin typeface="微软雅黑" panose="020B0503020204020204" charset="-122"/>
+                          <a:ea typeface="微软雅黑" panose="020B0503020204020204" charset="-122"/>
+                        </a:rPr>
+                        <a:t>，</a:t>
+                      </a:r>
+                      <a:endParaRPr lang="zh-CN" altLang="en-US" sz="1000" b="0">
+                        <a:solidFill>
+                          <a:schemeClr val="tx1"/>
+                        </a:solidFill>
+                        <a:latin typeface="微软雅黑" panose="020B0503020204020204" charset="-122"/>
+                        <a:ea typeface="微软雅黑" panose="020B0503020204020204" charset="-122"/>
+                      </a:endParaRPr>
+                    </a:p>
+                  </a:txBody>
+                  <a:tcPr anchor="ctr" anchorCtr="0">
+                    <a:lnL w="12700" cmpd="sng">
+                      <a:solidFill>
+                        <a:schemeClr val="tx1"/>
+                      </a:solidFill>
+                      <a:prstDash val="solid"/>
+                    </a:lnL>
+                    <a:lnR w="12700" cmpd="sng">
+                      <a:solidFill>
+                        <a:schemeClr val="tx1"/>
+                      </a:solidFill>
+                      <a:prstDash val="solid"/>
+                    </a:lnR>
+                    <a:lnT w="12700" cmpd="sng">
+                      <a:solidFill>
+                        <a:schemeClr val="tx1"/>
+                      </a:solidFill>
+                      <a:prstDash val="solid"/>
+                    </a:lnT>
+                    <a:lnB w="12700" cmpd="sng">
+                      <a:solidFill>
+                        <a:schemeClr val="tx1"/>
+                      </a:solidFill>
+                      <a:prstDash val="solid"/>
+                    </a:lnB>
+                    <a:noFill/>
+                  </a:tcPr>
+                </a:tc>
+                <a:tc>
+                  <a:txBody>
+                    <a:bodyPr/>
+                    <a:p>
+                      <a:pPr algn="ctr">
+                        <a:buNone/>
+                      </a:pPr>
+                      <a:r>
+                        <a:rPr lang="zh-CN" altLang="en-US" sz="1000" b="0">
+                          <a:solidFill>
+                            <a:schemeClr val="tx1"/>
+                          </a:solidFill>
+                          <a:latin typeface="微软雅黑" panose="020B0503020204020204" charset="-122"/>
+                          <a:ea typeface="微软雅黑" panose="020B0503020204020204" charset="-122"/>
+                        </a:rPr>
+                        <a:t>我</a:t>
+                      </a:r>
+                      <a:endParaRPr lang="zh-CN" altLang="en-US" sz="1000" b="0">
+                        <a:solidFill>
+                          <a:schemeClr val="tx1"/>
+                        </a:solidFill>
+                        <a:latin typeface="微软雅黑" panose="020B0503020204020204" charset="-122"/>
+                        <a:ea typeface="微软雅黑" panose="020B0503020204020204" charset="-122"/>
+                      </a:endParaRPr>
+                    </a:p>
+                  </a:txBody>
+                  <a:tcPr anchor="ctr" anchorCtr="0">
+                    <a:lnL w="12700" cmpd="sng">
+                      <a:solidFill>
+                        <a:schemeClr val="tx1"/>
+                      </a:solidFill>
+                      <a:prstDash val="solid"/>
+                    </a:lnL>
+                    <a:lnR w="12700" cmpd="sng">
+                      <a:solidFill>
+                        <a:schemeClr val="tx1"/>
+                      </a:solidFill>
+                      <a:prstDash val="solid"/>
+                    </a:lnR>
+                    <a:lnT w="12700" cmpd="sng">
+                      <a:solidFill>
+                        <a:schemeClr val="tx1"/>
+                      </a:solidFill>
+                      <a:prstDash val="solid"/>
+                    </a:lnT>
+                    <a:lnB w="12700" cmpd="sng">
+                      <a:solidFill>
+                        <a:schemeClr val="tx1"/>
+                      </a:solidFill>
+                      <a:prstDash val="solid"/>
+                    </a:lnB>
+                    <a:noFill/>
+                  </a:tcPr>
+                </a:tc>
+                <a:tc>
+                  <a:txBody>
+                    <a:bodyPr/>
+                    <a:p>
+                      <a:pPr algn="ctr">
+                        <a:buNone/>
+                      </a:pPr>
+                      <a:r>
+                        <a:rPr lang="zh-CN" altLang="en-US" sz="1000" b="0">
+                          <a:solidFill>
+                            <a:schemeClr val="tx1"/>
+                          </a:solidFill>
+                          <a:latin typeface="微软雅黑" panose="020B0503020204020204" charset="-122"/>
+                          <a:ea typeface="微软雅黑" panose="020B0503020204020204" charset="-122"/>
+                        </a:rPr>
+                        <a:t>叫</a:t>
+                      </a:r>
+                      <a:endParaRPr lang="zh-CN" altLang="en-US" sz="1000" b="0">
+                        <a:solidFill>
+                          <a:schemeClr val="tx1"/>
+                        </a:solidFill>
+                        <a:latin typeface="微软雅黑" panose="020B0503020204020204" charset="-122"/>
+                        <a:ea typeface="微软雅黑" panose="020B0503020204020204" charset="-122"/>
+                      </a:endParaRPr>
+                    </a:p>
+                  </a:txBody>
+                  <a:tcPr anchor="ctr" anchorCtr="0">
+                    <a:lnL w="12700" cmpd="sng">
+                      <a:solidFill>
+                        <a:schemeClr val="tx1"/>
+                      </a:solidFill>
+                      <a:prstDash val="solid"/>
+                    </a:lnL>
+                    <a:lnR w="12700" cmpd="sng">
+                      <a:solidFill>
+                        <a:schemeClr val="tx1"/>
+                      </a:solidFill>
+                      <a:prstDash val="solid"/>
+                    </a:lnR>
+                    <a:lnT w="12700" cmpd="sng">
+                      <a:solidFill>
+                        <a:schemeClr val="tx1"/>
+                      </a:solidFill>
+                      <a:prstDash val="solid"/>
+                    </a:lnT>
+                    <a:lnB w="12700" cmpd="sng">
+                      <a:solidFill>
+                        <a:schemeClr val="tx1"/>
+                      </a:solidFill>
+                      <a:prstDash val="solid"/>
+                    </a:lnB>
+                    <a:noFill/>
+                  </a:tcPr>
+                </a:tc>
+                <a:tc>
+                  <a:txBody>
+                    <a:bodyPr/>
+                    <a:p>
+                      <a:pPr algn="ctr">
+                        <a:buNone/>
+                      </a:pPr>
+                      <a:r>
+                        <a:rPr lang="en-US" altLang="zh-CN" sz="1000" b="0">
+                          <a:solidFill>
+                            <a:schemeClr val="tx1"/>
+                          </a:solidFill>
+                          <a:latin typeface="微软雅黑" panose="020B0503020204020204" charset="-122"/>
+                          <a:ea typeface="微软雅黑" panose="020B0503020204020204" charset="-122"/>
+                        </a:rPr>
+                        <a:t>jzplp</a:t>
+                      </a:r>
+                      <a:endParaRPr lang="en-US" altLang="zh-CN" sz="1000" b="0">
+                        <a:solidFill>
+                          <a:schemeClr val="tx1"/>
+                        </a:solidFill>
+                        <a:latin typeface="微软雅黑" panose="020B0503020204020204" charset="-122"/>
+                        <a:ea typeface="微软雅黑" panose="020B0503020204020204" charset="-122"/>
+                      </a:endParaRPr>
+                    </a:p>
+                  </a:txBody>
+                  <a:tcPr anchor="ctr" anchorCtr="0">
+                    <a:lnL w="12700" cmpd="sng">
+                      <a:solidFill>
+                        <a:schemeClr val="tx1"/>
+                      </a:solidFill>
+                      <a:prstDash val="solid"/>
+                    </a:lnL>
+                    <a:lnR w="12700" cmpd="sng">
+                      <a:solidFill>
+                        <a:schemeClr val="tx1"/>
+                      </a:solidFill>
+                      <a:prstDash val="solid"/>
+                    </a:lnR>
+                    <a:lnT w="12700" cmpd="sng">
+                      <a:solidFill>
+                        <a:schemeClr val="tx1"/>
+                      </a:solidFill>
+                      <a:prstDash val="solid"/>
+                    </a:lnT>
+                    <a:lnB w="12700" cmpd="sng">
+                      <a:solidFill>
+                        <a:schemeClr val="tx1"/>
+                      </a:solidFill>
+                      <a:prstDash val="solid"/>
+                    </a:lnB>
+                    <a:noFill/>
+                  </a:tcPr>
+                </a:tc>
+              </a:tr>
+              <a:tr h="243840">
+                <a:tc>
+                  <a:txBody>
+                    <a:bodyPr/>
+                    <a:p>
+                      <a:pPr algn="ctr">
+                        <a:buNone/>
+                      </a:pPr>
+                      <a:r>
+                        <a:rPr lang="zh-CN" altLang="en-US" sz="1000" b="0">
+                          <a:solidFill>
+                            <a:schemeClr val="tx1"/>
+                          </a:solidFill>
+                          <a:latin typeface="微软雅黑" panose="020B0503020204020204" charset="-122"/>
+                          <a:ea typeface="微软雅黑" panose="020B0503020204020204" charset="-122"/>
+                        </a:rPr>
+                        <a:t>今天</a:t>
+                      </a:r>
+                      <a:endParaRPr lang="zh-CN" altLang="en-US" sz="1000" b="0">
+                        <a:solidFill>
+                          <a:schemeClr val="tx1"/>
+                        </a:solidFill>
+                        <a:latin typeface="微软雅黑" panose="020B0503020204020204" charset="-122"/>
+                        <a:ea typeface="微软雅黑" panose="020B0503020204020204" charset="-122"/>
+                      </a:endParaRPr>
+                    </a:p>
+                  </a:txBody>
+                  <a:tcPr anchor="ctr" anchorCtr="0">
+                    <a:lnL w="12700" cmpd="sng">
+                      <a:solidFill>
+                        <a:schemeClr val="tx1"/>
+                      </a:solidFill>
+                      <a:prstDash val="solid"/>
+                    </a:lnL>
+                    <a:lnR w="12700" cmpd="sng">
+                      <a:solidFill>
+                        <a:schemeClr val="tx1"/>
+                      </a:solidFill>
+                      <a:prstDash val="solid"/>
+                    </a:lnR>
+                    <a:lnT w="12700" cmpd="sng">
+                      <a:solidFill>
+                        <a:schemeClr val="tx1"/>
+                      </a:solidFill>
+                      <a:prstDash val="solid"/>
+                    </a:lnT>
+                    <a:lnB w="12700" cmpd="sng">
+                      <a:solidFill>
+                        <a:schemeClr val="tx1"/>
+                      </a:solidFill>
+                      <a:prstDash val="solid"/>
+                    </a:lnB>
+                    <a:noFill/>
+                  </a:tcPr>
+                </a:tc>
+                <a:tc>
+                  <a:txBody>
+                    <a:bodyPr/>
+                    <a:p>
+                      <a:pPr algn="ctr">
+                        <a:buNone/>
+                      </a:pPr>
+                      <a:r>
+                        <a:rPr lang="zh-CN" altLang="en-US" sz="1000" b="0">
+                          <a:solidFill>
+                            <a:schemeClr val="tx1"/>
+                          </a:solidFill>
+                          <a:latin typeface="微软雅黑" panose="020B0503020204020204" charset="-122"/>
+                          <a:ea typeface="微软雅黑" panose="020B0503020204020204" charset="-122"/>
+                        </a:rPr>
+                        <a:t>天气</a:t>
+                      </a:r>
+                      <a:endParaRPr lang="zh-CN" altLang="en-US" sz="1000" b="0">
+                        <a:solidFill>
+                          <a:schemeClr val="tx1"/>
+                        </a:solidFill>
+                        <a:latin typeface="微软雅黑" panose="020B0503020204020204" charset="-122"/>
+                        <a:ea typeface="微软雅黑" panose="020B0503020204020204" charset="-122"/>
+                      </a:endParaRPr>
+                    </a:p>
+                  </a:txBody>
+                  <a:tcPr anchor="ctr" anchorCtr="0">
+                    <a:lnL w="12700" cmpd="sng">
+                      <a:solidFill>
+                        <a:schemeClr val="tx1"/>
+                      </a:solidFill>
+                      <a:prstDash val="solid"/>
+                    </a:lnL>
+                    <a:lnR w="12700" cmpd="sng">
+                      <a:solidFill>
+                        <a:schemeClr val="tx1"/>
+                      </a:solidFill>
+                      <a:prstDash val="solid"/>
+                    </a:lnR>
+                    <a:lnT w="12700" cmpd="sng">
+                      <a:solidFill>
+                        <a:schemeClr val="tx1"/>
+                      </a:solidFill>
+                      <a:prstDash val="solid"/>
+                    </a:lnT>
+                    <a:lnB w="12700" cmpd="sng">
+                      <a:solidFill>
+                        <a:schemeClr val="tx1"/>
+                      </a:solidFill>
+                      <a:prstDash val="solid"/>
+                    </a:lnB>
+                    <a:noFill/>
+                  </a:tcPr>
+                </a:tc>
+                <a:tc>
+                  <a:txBody>
+                    <a:bodyPr/>
+                    <a:p>
+                      <a:pPr algn="ctr">
+                        <a:buNone/>
+                      </a:pPr>
+                      <a:r>
+                        <a:rPr lang="zh-CN" altLang="en-US" sz="1000" b="0">
+                          <a:solidFill>
+                            <a:schemeClr val="tx1"/>
+                          </a:solidFill>
+                          <a:latin typeface="微软雅黑" panose="020B0503020204020204" charset="-122"/>
+                          <a:ea typeface="微软雅黑" panose="020B0503020204020204" charset="-122"/>
+                        </a:rPr>
+                        <a:t>如何</a:t>
+                      </a:r>
+                      <a:endParaRPr lang="zh-CN" altLang="en-US" sz="1000" b="0">
+                        <a:solidFill>
+                          <a:schemeClr val="tx1"/>
+                        </a:solidFill>
+                        <a:latin typeface="微软雅黑" panose="020B0503020204020204" charset="-122"/>
+                        <a:ea typeface="微软雅黑" panose="020B0503020204020204" charset="-122"/>
+                      </a:endParaRPr>
+                    </a:p>
+                  </a:txBody>
+                  <a:tcPr anchor="ctr" anchorCtr="0">
+                    <a:lnL w="12700" cmpd="sng">
+                      <a:solidFill>
+                        <a:schemeClr val="tx1"/>
+                      </a:solidFill>
+                      <a:prstDash val="solid"/>
+                    </a:lnL>
+                    <a:lnR w="12700" cmpd="sng">
+                      <a:solidFill>
+                        <a:schemeClr val="tx1"/>
+                      </a:solidFill>
+                      <a:prstDash val="solid"/>
+                    </a:lnR>
+                    <a:lnT w="12700" cmpd="sng">
+                      <a:solidFill>
+                        <a:schemeClr val="tx1"/>
+                      </a:solidFill>
+                      <a:prstDash val="solid"/>
+                    </a:lnT>
+                    <a:lnB w="12700" cmpd="sng">
+                      <a:solidFill>
+                        <a:schemeClr val="tx1"/>
+                      </a:solidFill>
+                      <a:prstDash val="solid"/>
+                    </a:lnB>
+                    <a:noFill/>
+                  </a:tcPr>
+                </a:tc>
+                <a:tc>
+                  <a:txBody>
+                    <a:bodyPr/>
+                    <a:p>
+                      <a:pPr algn="ctr">
+                        <a:buNone/>
+                      </a:pPr>
+                      <a:r>
+                        <a:rPr lang="en-US" altLang="zh-CN" sz="1000" b="0">
+                          <a:solidFill>
+                            <a:schemeClr val="tx1"/>
+                          </a:solidFill>
+                          <a:latin typeface="微软雅黑" panose="020B0503020204020204" charset="-122"/>
+                          <a:ea typeface="微软雅黑" panose="020B0503020204020204" charset="-122"/>
+                        </a:rPr>
+                        <a:t>？</a:t>
+                      </a:r>
+                      <a:endParaRPr lang="en-US" altLang="zh-CN" sz="1000" b="0">
+                        <a:solidFill>
+                          <a:schemeClr val="tx1"/>
+                        </a:solidFill>
+                        <a:latin typeface="微软雅黑" panose="020B0503020204020204" charset="-122"/>
+                        <a:ea typeface="微软雅黑" panose="020B0503020204020204" charset="-122"/>
+                      </a:endParaRPr>
+                    </a:p>
+                  </a:txBody>
+                  <a:tcPr anchor="ctr" anchorCtr="0">
+                    <a:lnL w="12700" cmpd="sng">
+                      <a:solidFill>
+                        <a:schemeClr val="tx1"/>
+                      </a:solidFill>
+                      <a:prstDash val="solid"/>
+                    </a:lnL>
+                    <a:lnR w="12700" cmpd="sng">
+                      <a:solidFill>
+                        <a:schemeClr val="tx1"/>
+                      </a:solidFill>
+                      <a:prstDash val="solid"/>
+                    </a:lnR>
+                    <a:lnT w="12700" cmpd="sng">
+                      <a:solidFill>
+                        <a:schemeClr val="tx1"/>
+                      </a:solidFill>
+                      <a:prstDash val="solid"/>
+                    </a:lnT>
+                    <a:lnB w="12700" cmpd="sng">
+                      <a:solidFill>
+                        <a:schemeClr val="tx1"/>
+                      </a:solidFill>
+                      <a:prstDash val="solid"/>
+                    </a:lnB>
+                    <a:noFill/>
+                  </a:tcPr>
+                </a:tc>
+                <a:tc>
+                  <a:txBody>
+                    <a:bodyPr/>
+                    <a:p>
+                      <a:pPr algn="ctr">
+                        <a:buNone/>
+                      </a:pPr>
+                      <a:endParaRPr lang="zh-CN" altLang="en-US" sz="1000" b="0">
+                        <a:solidFill>
+                          <a:schemeClr val="tx1"/>
+                        </a:solidFill>
+                        <a:latin typeface="微软雅黑" panose="020B0503020204020204" charset="-122"/>
+                        <a:ea typeface="微软雅黑" panose="020B0503020204020204" charset="-122"/>
+                      </a:endParaRPr>
+                    </a:p>
+                  </a:txBody>
+                  <a:tcPr anchor="ctr" anchorCtr="0">
+                    <a:lnL w="12700" cmpd="sng">
+                      <a:solidFill>
+                        <a:schemeClr val="tx1"/>
+                      </a:solidFill>
+                      <a:prstDash val="solid"/>
+                    </a:lnL>
+                    <a:lnR w="12700" cmpd="sng">
+                      <a:solidFill>
+                        <a:schemeClr val="tx1"/>
+                      </a:solidFill>
+                      <a:prstDash val="solid"/>
+                    </a:lnR>
+                    <a:lnT w="12700" cmpd="sng">
+                      <a:solidFill>
+                        <a:schemeClr val="tx1"/>
+                      </a:solidFill>
+                      <a:prstDash val="solid"/>
+                    </a:lnT>
+                    <a:lnB w="12700" cmpd="sng">
+                      <a:solidFill>
+                        <a:schemeClr val="tx1"/>
+                      </a:solidFill>
+                      <a:prstDash val="solid"/>
+                    </a:lnB>
+                    <a:noFill/>
+                  </a:tcPr>
+                </a:tc>
+              </a:tr>
+              <a:tr h="243840">
+                <a:tc>
+                  <a:txBody>
+                    <a:bodyPr/>
+                    <a:p>
+                      <a:pPr algn="ctr">
+                        <a:buNone/>
+                      </a:pPr>
+                      <a:r>
+                        <a:rPr lang="zh-CN" altLang="en-US" sz="1000" b="0">
+                          <a:solidFill>
+                            <a:schemeClr val="tx1"/>
+                          </a:solidFill>
+                          <a:latin typeface="微软雅黑" panose="020B0503020204020204" charset="-122"/>
+                          <a:ea typeface="微软雅黑" panose="020B0503020204020204" charset="-122"/>
+                        </a:rPr>
+                        <a:t>我</a:t>
+                      </a:r>
+                      <a:endParaRPr lang="zh-CN" altLang="en-US" sz="1000" b="0">
+                        <a:solidFill>
+                          <a:schemeClr val="tx1"/>
+                        </a:solidFill>
+                        <a:latin typeface="微软雅黑" panose="020B0503020204020204" charset="-122"/>
+                        <a:ea typeface="微软雅黑" panose="020B0503020204020204" charset="-122"/>
+                      </a:endParaRPr>
+                    </a:p>
+                  </a:txBody>
+                  <a:tcPr anchor="ctr" anchorCtr="0">
+                    <a:lnL w="12700" cmpd="sng">
+                      <a:solidFill>
+                        <a:schemeClr val="tx1"/>
+                      </a:solidFill>
+                      <a:prstDash val="solid"/>
+                    </a:lnL>
+                    <a:lnR w="12700" cmpd="sng">
+                      <a:solidFill>
+                        <a:schemeClr val="tx1"/>
+                      </a:solidFill>
+                      <a:prstDash val="solid"/>
+                    </a:lnR>
+                    <a:lnT w="12700" cmpd="sng">
+                      <a:solidFill>
+                        <a:schemeClr val="tx1"/>
+                      </a:solidFill>
+                      <a:prstDash val="solid"/>
+                    </a:lnT>
+                    <a:lnB w="12700" cmpd="sng">
+                      <a:solidFill>
+                        <a:schemeClr val="tx1"/>
+                      </a:solidFill>
+                      <a:prstDash val="solid"/>
+                    </a:lnB>
+                    <a:noFill/>
+                  </a:tcPr>
+                </a:tc>
+                <a:tc>
+                  <a:txBody>
+                    <a:bodyPr/>
+                    <a:p>
+                      <a:pPr algn="ctr">
+                        <a:buNone/>
+                      </a:pPr>
+                      <a:r>
+                        <a:rPr lang="zh-CN" altLang="en-US" sz="1000" b="0">
+                          <a:solidFill>
+                            <a:schemeClr val="tx1"/>
+                          </a:solidFill>
+                          <a:latin typeface="微软雅黑" panose="020B0503020204020204" charset="-122"/>
+                          <a:ea typeface="微软雅黑" panose="020B0503020204020204" charset="-122"/>
+                        </a:rPr>
+                        <a:t>喜欢</a:t>
+                      </a:r>
+                      <a:endParaRPr lang="zh-CN" altLang="en-US" sz="1000" b="0">
+                        <a:solidFill>
+                          <a:schemeClr val="tx1"/>
+                        </a:solidFill>
+                        <a:latin typeface="微软雅黑" panose="020B0503020204020204" charset="-122"/>
+                        <a:ea typeface="微软雅黑" panose="020B0503020204020204" charset="-122"/>
+                      </a:endParaRPr>
+                    </a:p>
+                  </a:txBody>
+                  <a:tcPr anchor="ctr" anchorCtr="0">
+                    <a:lnL w="12700" cmpd="sng">
+                      <a:solidFill>
+                        <a:schemeClr val="tx1"/>
+                      </a:solidFill>
+                      <a:prstDash val="solid"/>
+                    </a:lnL>
+                    <a:lnR w="12700" cmpd="sng">
+                      <a:solidFill>
+                        <a:schemeClr val="tx1"/>
+                      </a:solidFill>
+                      <a:prstDash val="solid"/>
+                    </a:lnR>
+                    <a:lnT w="12700" cmpd="sng">
+                      <a:solidFill>
+                        <a:schemeClr val="tx1"/>
+                      </a:solidFill>
+                      <a:prstDash val="solid"/>
+                    </a:lnT>
+                    <a:lnB w="12700" cmpd="sng">
+                      <a:solidFill>
+                        <a:schemeClr val="tx1"/>
+                      </a:solidFill>
+                      <a:prstDash val="solid"/>
+                    </a:lnB>
+                    <a:noFill/>
+                  </a:tcPr>
+                </a:tc>
+                <a:tc>
+                  <a:txBody>
+                    <a:bodyPr/>
+                    <a:p>
+                      <a:pPr algn="ctr">
+                        <a:buNone/>
+                      </a:pPr>
+                      <a:r>
+                        <a:rPr lang="zh-CN" altLang="en-US" sz="1000" b="0">
+                          <a:solidFill>
+                            <a:schemeClr val="tx1"/>
+                          </a:solidFill>
+                          <a:latin typeface="微软雅黑" panose="020B0503020204020204" charset="-122"/>
+                          <a:ea typeface="微软雅黑" panose="020B0503020204020204" charset="-122"/>
+                        </a:rPr>
+                        <a:t>使用</a:t>
+                      </a:r>
+                      <a:endParaRPr lang="zh-CN" altLang="en-US" sz="1000" b="0">
+                        <a:solidFill>
+                          <a:schemeClr val="tx1"/>
+                        </a:solidFill>
+                        <a:latin typeface="微软雅黑" panose="020B0503020204020204" charset="-122"/>
+                        <a:ea typeface="微软雅黑" panose="020B0503020204020204" charset="-122"/>
+                      </a:endParaRPr>
+                    </a:p>
+                  </a:txBody>
+                  <a:tcPr anchor="ctr" anchorCtr="0">
+                    <a:lnL w="12700" cmpd="sng">
+                      <a:solidFill>
+                        <a:schemeClr val="tx1"/>
+                      </a:solidFill>
+                      <a:prstDash val="solid"/>
+                    </a:lnL>
+                    <a:lnR w="12700" cmpd="sng">
+                      <a:solidFill>
+                        <a:schemeClr val="tx1"/>
+                      </a:solidFill>
+                      <a:prstDash val="solid"/>
+                    </a:lnR>
+                    <a:lnT w="12700" cmpd="sng">
+                      <a:solidFill>
+                        <a:schemeClr val="tx1"/>
+                      </a:solidFill>
+                      <a:prstDash val="solid"/>
+                    </a:lnT>
+                    <a:lnB w="12700" cmpd="sng">
+                      <a:solidFill>
+                        <a:schemeClr val="tx1"/>
+                      </a:solidFill>
+                      <a:prstDash val="solid"/>
+                    </a:lnB>
+                    <a:noFill/>
+                  </a:tcPr>
+                </a:tc>
+                <a:tc>
+                  <a:txBody>
+                    <a:bodyPr/>
+                    <a:p>
+                      <a:pPr algn="ctr">
+                        <a:buNone/>
+                      </a:pPr>
+                      <a:r>
+                        <a:rPr lang="en-US" altLang="zh-CN" sz="1000" b="0">
+                          <a:solidFill>
+                            <a:schemeClr val="tx1"/>
+                          </a:solidFill>
+                          <a:latin typeface="微软雅黑" panose="020B0503020204020204" charset="-122"/>
+                          <a:ea typeface="微软雅黑" panose="020B0503020204020204" charset="-122"/>
+                        </a:rPr>
+                        <a:t>AI</a:t>
+                      </a:r>
+                      <a:endParaRPr lang="en-US" altLang="zh-CN" sz="1000" b="0">
+                        <a:solidFill>
+                          <a:schemeClr val="tx1"/>
+                        </a:solidFill>
+                        <a:latin typeface="微软雅黑" panose="020B0503020204020204" charset="-122"/>
+                        <a:ea typeface="微软雅黑" panose="020B0503020204020204" charset="-122"/>
+                      </a:endParaRPr>
+                    </a:p>
+                  </a:txBody>
+                  <a:tcPr anchor="ctr" anchorCtr="0">
+                    <a:lnL w="12700" cmpd="sng">
+                      <a:solidFill>
+                        <a:schemeClr val="tx1"/>
+                      </a:solidFill>
+                      <a:prstDash val="solid"/>
+                    </a:lnL>
+                    <a:lnR w="12700" cmpd="sng">
+                      <a:solidFill>
+                        <a:schemeClr val="tx1"/>
+                      </a:solidFill>
+                      <a:prstDash val="solid"/>
+                    </a:lnR>
+                    <a:lnT w="12700" cmpd="sng">
+                      <a:solidFill>
+                        <a:schemeClr val="tx1"/>
+                      </a:solidFill>
+                      <a:prstDash val="solid"/>
+                    </a:lnT>
+                    <a:lnB w="12700" cmpd="sng">
+                      <a:solidFill>
+                        <a:schemeClr val="tx1"/>
+                      </a:solidFill>
+                      <a:prstDash val="solid"/>
+                    </a:lnB>
+                    <a:noFill/>
+                  </a:tcPr>
+                </a:tc>
+                <a:tc>
+                  <a:txBody>
+                    <a:bodyPr/>
+                    <a:p>
+                      <a:pPr algn="ctr">
+                        <a:buNone/>
+                      </a:pPr>
+                      <a:r>
+                        <a:rPr lang="zh-CN" altLang="en-US" sz="1000" b="0">
+                          <a:solidFill>
+                            <a:schemeClr val="tx1"/>
+                          </a:solidFill>
+                          <a:latin typeface="微软雅黑" panose="020B0503020204020204" charset="-122"/>
+                          <a:ea typeface="微软雅黑" panose="020B0503020204020204" charset="-122"/>
+                        </a:rPr>
+                        <a:t>！</a:t>
+                      </a:r>
+                      <a:endParaRPr lang="zh-CN" altLang="en-US" sz="1000" b="0">
+                        <a:solidFill>
+                          <a:schemeClr val="tx1"/>
+                        </a:solidFill>
+                        <a:latin typeface="微软雅黑" panose="020B0503020204020204" charset="-122"/>
+                        <a:ea typeface="微软雅黑" panose="020B0503020204020204" charset="-122"/>
+                      </a:endParaRPr>
+                    </a:p>
+                  </a:txBody>
+                  <a:tcPr anchor="ctr" anchorCtr="0">
+                    <a:lnL w="12700" cmpd="sng">
+                      <a:solidFill>
+                        <a:schemeClr val="tx1"/>
+                      </a:solidFill>
+                      <a:prstDash val="solid"/>
+                    </a:lnL>
+                    <a:lnR w="12700" cmpd="sng">
+                      <a:solidFill>
+                        <a:schemeClr val="tx1"/>
+                      </a:solidFill>
+                      <a:prstDash val="solid"/>
+                    </a:lnR>
+                    <a:lnT w="12700" cmpd="sng">
+                      <a:solidFill>
+                        <a:schemeClr val="tx1"/>
+                      </a:solidFill>
+                      <a:prstDash val="solid"/>
+                    </a:lnT>
+                    <a:lnB w="12700" cmpd="sng">
+                      <a:solidFill>
+                        <a:schemeClr val="tx1"/>
+                      </a:solidFill>
+                      <a:prstDash val="solid"/>
+                    </a:lnB>
+                    <a:noFill/>
+                  </a:tcPr>
+                </a:tc>
+              </a:tr>
+            </a:tbl>
+          </a:graphicData>
+        </a:graphic>
+      </p:graphicFrame>
+      <p:sp>
+        <p:nvSpPr>
+          <p:cNvPr id="27" name="文本框 26"/>
           <p:cNvSpPr txBox="1"/>
           <p:nvPr/>
         </p:nvSpPr>
         <p:spPr>
           <a:xfrm>
-            <a:off x="866775" y="516890"/>
-            <a:ext cx="3148330" cy="368300"/>
+            <a:off x="854075" y="614045"/>
+            <a:ext cx="897890" cy="229870"/>
           </a:xfrm>
           <a:prstGeom prst="rect">
             <a:avLst/>
           </a:prstGeom>
-          <a:noFill/>
-        </p:spPr>
-        <p:txBody>
-          <a:bodyPr wrap="square" rtlCol="0" anchor="t">
+          <a:solidFill>
+            <a:schemeClr val="accent1">
+              <a:lumMod val="20000"/>
+              <a:lumOff val="80000"/>
+            </a:schemeClr>
+          </a:solidFill>
+        </p:spPr>
+        <p:txBody>
+          <a:bodyPr wrap="square" rtlCol="0">
             <a:spAutoFit/>
           </a:bodyPr>
           <a:lstStyle/>
           <a:p>
-            <a:pPr algn="l"/>
-            <a:r>
-              <a:rPr lang="en-US" altLang="zh-CN"/>
-              <a:t>FP16</a:t>
-            </a:r>
-            <a:endParaRPr lang="en-US" altLang="zh-CN"/>
-          </a:p>
-        </p:txBody>
-      </p:sp>
-      <p:grpSp>
-        <p:nvGrpSpPr>
-          <p:cNvPr id="42" name="组合 41"/>
-          <p:cNvGrpSpPr/>
-          <p:nvPr/>
-        </p:nvGrpSpPr>
-        <p:grpSpPr>
-          <a:xfrm>
-            <a:off x="1017905" y="2047240"/>
-            <a:ext cx="3277870" cy="1381760"/>
-            <a:chOff x="1604" y="1646"/>
-            <a:chExt cx="4748" cy="2176"/>
-          </a:xfrm>
-        </p:grpSpPr>
-        <p:grpSp>
-          <p:nvGrpSpPr>
-            <p:cNvPr id="13" name="组合 12"/>
-            <p:cNvGrpSpPr/>
-            <p:nvPr/>
-          </p:nvGrpSpPr>
-          <p:grpSpPr>
-            <a:xfrm>
-              <a:off x="1604" y="2998"/>
-              <a:ext cx="4749" cy="824"/>
-              <a:chOff x="1604" y="3742"/>
-              <a:chExt cx="5042" cy="1040"/>
-            </a:xfrm>
-          </p:grpSpPr>
-          <p:sp>
-            <p:nvSpPr>
-              <p:cNvPr id="6" name="矩形 5"/>
-              <p:cNvSpPr/>
-              <p:nvPr/>
-            </p:nvSpPr>
-            <p:spPr>
-              <a:xfrm>
-                <a:off x="1604" y="3742"/>
-                <a:ext cx="5042" cy="1040"/>
-              </a:xfrm>
-              <a:prstGeom prst="rect">
-                <a:avLst/>
-              </a:prstGeom>
-              <a:solidFill>
-                <a:schemeClr val="accent1">
-                  <a:lumMod val="40000"/>
-                  <a:lumOff val="60000"/>
-                </a:schemeClr>
-              </a:solidFill>
-              <a:ln w="12700">
-                <a:solidFill>
-                  <a:schemeClr val="tx1"/>
-                </a:solidFill>
-              </a:ln>
-            </p:spPr>
-            <p:style>
-              <a:lnRef idx="2">
-                <a:schemeClr val="accent1">
-                  <a:shade val="50000"/>
-                </a:schemeClr>
-              </a:lnRef>
-              <a:fillRef idx="1">
-                <a:schemeClr val="accent1"/>
-              </a:fillRef>
-              <a:effectRef idx="0">
-                <a:schemeClr val="accent1"/>
-              </a:effectRef>
-              <a:fontRef idx="minor">
-                <a:schemeClr val="lt1"/>
-              </a:fontRef>
-            </p:style>
-            <p:txBody>
-              <a:bodyPr rtlCol="0" anchor="ctr"/>
-              <a:lstStyle/>
-              <a:p>
-                <a:pPr algn="ctr"/>
-                <a:endParaRPr lang="zh-CN" altLang="en-US"/>
-              </a:p>
-            </p:txBody>
-          </p:sp>
-          <p:sp>
-            <p:nvSpPr>
-              <p:cNvPr id="12" name="文本框 11"/>
-              <p:cNvSpPr txBox="1"/>
-              <p:nvPr/>
-            </p:nvSpPr>
-            <p:spPr>
-              <a:xfrm>
-                <a:off x="1730" y="3896"/>
-                <a:ext cx="4831" cy="798"/>
-              </a:xfrm>
-              <a:prstGeom prst="rect">
-                <a:avLst/>
-              </a:prstGeom>
-              <a:noFill/>
-              <a:ln>
-                <a:noFill/>
-              </a:ln>
-            </p:spPr>
-            <p:txBody>
-              <a:bodyPr wrap="square" rtlCol="0" anchor="t">
-                <a:noAutofit/>
-              </a:bodyPr>
-              <a:lstStyle/>
-              <a:p>
-                <a:pPr algn="l"/>
-                <a:r>
-                  <a:rPr lang="zh-CN" altLang="en-US"/>
-                  <a:t>超级块最小值</a:t>
-                </a:r>
-                <a:r>
-                  <a:rPr lang="en-US" altLang="zh-CN"/>
-                  <a:t>       16</a:t>
-                </a:r>
-                <a:r>
-                  <a:rPr lang="en-US" altLang="zh-CN"/>
-                  <a:t>bits   d</a:t>
-                </a:r>
-                <a:r>
-                  <a:rPr lang="en-US" altLang="zh-CN"/>
-                  <a:t>min</a:t>
-                </a:r>
-                <a:endParaRPr lang="en-US" altLang="zh-CN"/>
-              </a:p>
-            </p:txBody>
-          </p:sp>
-        </p:grpSp>
-        <p:sp>
-          <p:nvSpPr>
-            <p:cNvPr id="4" name="矩形 3"/>
-            <p:cNvSpPr/>
-            <p:nvPr/>
-          </p:nvSpPr>
-          <p:spPr>
-            <a:xfrm>
-              <a:off x="1604" y="1646"/>
-              <a:ext cx="4748" cy="888"/>
-            </a:xfrm>
-            <a:prstGeom prst="rect">
-              <a:avLst/>
-            </a:prstGeom>
-            <a:solidFill>
-              <a:schemeClr val="accent1">
-                <a:lumMod val="40000"/>
-                <a:lumOff val="60000"/>
-              </a:schemeClr>
-            </a:solidFill>
-            <a:ln w="12700">
-              <a:solidFill>
-                <a:schemeClr val="tx1"/>
-              </a:solidFill>
-            </a:ln>
-          </p:spPr>
-          <p:style>
-            <a:lnRef idx="2">
-              <a:schemeClr val="accent1">
-                <a:shade val="50000"/>
-              </a:schemeClr>
-            </a:lnRef>
-            <a:fillRef idx="1">
-              <a:schemeClr val="accent1"/>
-            </a:fillRef>
-            <a:effectRef idx="0">
-              <a:schemeClr val="accent1"/>
-            </a:effectRef>
-            <a:fontRef idx="minor">
-              <a:schemeClr val="lt1"/>
-            </a:fontRef>
-          </p:style>
-          <p:txBody>
-            <a:bodyPr rtlCol="0" anchor="ctr"/>
-            <a:lstStyle/>
-            <a:p>
-              <a:pPr algn="ctr"/>
-              <a:endParaRPr lang="zh-CN" altLang="en-US"/>
-            </a:p>
-          </p:txBody>
-        </p:sp>
-        <p:sp>
-          <p:nvSpPr>
-            <p:cNvPr id="5" name="文本框 4"/>
-            <p:cNvSpPr txBox="1"/>
-            <p:nvPr/>
-          </p:nvSpPr>
-          <p:spPr>
-            <a:xfrm>
-              <a:off x="1723" y="1800"/>
-              <a:ext cx="4354" cy="798"/>
-            </a:xfrm>
-            <a:prstGeom prst="rect">
-              <a:avLst/>
-            </a:prstGeom>
-            <a:noFill/>
-            <a:ln>
-              <a:noFill/>
-            </a:ln>
-          </p:spPr>
-          <p:txBody>
-            <a:bodyPr wrap="square" rtlCol="0" anchor="t">
-              <a:noAutofit/>
-            </a:bodyPr>
-            <a:lstStyle/>
-            <a:p>
-              <a:pPr algn="l"/>
-              <a:r>
-                <a:rPr lang="zh-CN" altLang="en-US"/>
-                <a:t>超级块缩放因子</a:t>
-              </a:r>
-              <a:r>
-                <a:rPr lang="en-US" altLang="zh-CN"/>
-                <a:t>  16bits </a:t>
-              </a:r>
-              <a:r>
-                <a:rPr lang="en-US" altLang="zh-CN"/>
-                <a:t>  </a:t>
-              </a:r>
-              <a:r>
-                <a:rPr lang="en-US" altLang="zh-CN"/>
-                <a:t>d</a:t>
-              </a:r>
-              <a:endParaRPr lang="en-US" altLang="zh-CN"/>
-            </a:p>
-          </p:txBody>
-        </p:sp>
-      </p:grpSp>
-      <p:sp>
-        <p:nvSpPr>
-          <p:cNvPr id="32" name="矩形 31"/>
-          <p:cNvSpPr/>
-          <p:nvPr/>
-        </p:nvSpPr>
-        <p:spPr>
-          <a:xfrm>
-            <a:off x="6699885" y="3268345"/>
-            <a:ext cx="4415155" cy="3361055"/>
+            <a:pPr algn="ctr"/>
+            <a:r>
+              <a:rPr lang="zh-CN" altLang="en-US" sz="900"/>
+              <a:t>训练集</a:t>
+            </a:r>
+            <a:endParaRPr lang="zh-CN" altLang="en-US" sz="900"/>
+          </a:p>
+        </p:txBody>
+      </p:sp>
+      <p:sp>
+        <p:nvSpPr>
+          <p:cNvPr id="18" name="文本框 17"/>
+          <p:cNvSpPr txBox="1"/>
+          <p:nvPr/>
+        </p:nvSpPr>
+        <p:spPr>
+          <a:xfrm>
+            <a:off x="5217795" y="400685"/>
+            <a:ext cx="897890" cy="229870"/>
           </a:xfrm>
           <a:prstGeom prst="rect">
             <a:avLst/>
           </a:prstGeom>
           <a:solidFill>
-            <a:schemeClr val="accent6">
-              <a:lumMod val="40000"/>
-              <a:lumOff val="60000"/>
+            <a:schemeClr val="accent1">
+              <a:lumMod val="20000"/>
+              <a:lumOff val="80000"/>
             </a:schemeClr>
           </a:solidFill>
-          <a:ln w="12700">
-            <a:solidFill>
-              <a:schemeClr val="tx1"/>
-            </a:solidFill>
-          </a:ln>
-        </p:spPr>
-        <p:style>
-          <a:lnRef idx="2">
+        </p:spPr>
+        <p:txBody>
+          <a:bodyPr wrap="square" rtlCol="0">
+            <a:spAutoFit/>
+          </a:bodyPr>
+          <a:lstStyle/>
+          <a:p>
+            <a:pPr algn="ctr"/>
+            <a:r>
+              <a:rPr lang="zh-CN" altLang="en-US" sz="900"/>
+              <a:t>验证集</a:t>
+            </a:r>
+            <a:endParaRPr lang="zh-CN" altLang="en-US" sz="900"/>
+          </a:p>
+        </p:txBody>
+      </p:sp>
+      <p:sp>
+        <p:nvSpPr>
+          <p:cNvPr id="19" name="文本框 18"/>
+          <p:cNvSpPr txBox="1"/>
+          <p:nvPr/>
+        </p:nvSpPr>
+        <p:spPr>
+          <a:xfrm>
+            <a:off x="8413115" y="436245"/>
+            <a:ext cx="897890" cy="229870"/>
+          </a:xfrm>
+          <a:prstGeom prst="rect">
+            <a:avLst/>
+          </a:prstGeom>
+          <a:solidFill>
             <a:schemeClr val="accent1">
-              <a:shade val="50000"/>
+              <a:lumMod val="20000"/>
+              <a:lumOff val="80000"/>
             </a:schemeClr>
-          </a:lnRef>
-          <a:fillRef idx="1">
-            <a:schemeClr val="accent1"/>
-          </a:fillRef>
-          <a:effectRef idx="0">
-            <a:schemeClr val="accent1"/>
-          </a:effectRef>
-          <a:fontRef idx="minor">
-            <a:schemeClr val="lt1"/>
-          </a:fontRef>
-        </p:style>
-        <p:txBody>
-          <a:bodyPr rtlCol="0" anchor="ctr"/>
+          </a:solidFill>
+        </p:spPr>
+        <p:txBody>
+          <a:bodyPr wrap="square" rtlCol="0">
+            <a:spAutoFit/>
+          </a:bodyPr>
           <a:lstStyle/>
           <a:p>
             <a:pPr algn="ctr"/>
-            <a:endParaRPr lang="zh-CN" altLang="en-US"/>
-          </a:p>
-        </p:txBody>
-      </p:sp>
-      <p:grpSp>
-        <p:nvGrpSpPr>
-          <p:cNvPr id="34" name="组合 33"/>
-          <p:cNvGrpSpPr/>
-          <p:nvPr/>
-        </p:nvGrpSpPr>
-        <p:grpSpPr>
-          <a:xfrm rot="0">
-            <a:off x="6273800" y="3489960"/>
-            <a:ext cx="3016885" cy="484505"/>
-            <a:chOff x="7013" y="4465"/>
-            <a:chExt cx="5298" cy="1248"/>
-          </a:xfrm>
-        </p:grpSpPr>
-        <p:sp>
-          <p:nvSpPr>
-            <p:cNvPr id="7" name="矩形 6"/>
-            <p:cNvSpPr/>
-            <p:nvPr/>
-          </p:nvSpPr>
-          <p:spPr>
-            <a:xfrm>
-              <a:off x="7013" y="4465"/>
-              <a:ext cx="5298" cy="1248"/>
-            </a:xfrm>
-            <a:prstGeom prst="rect">
-              <a:avLst/>
-            </a:prstGeom>
-            <a:solidFill>
-              <a:schemeClr val="accent2">
-                <a:lumMod val="40000"/>
-                <a:lumOff val="60000"/>
-              </a:schemeClr>
-            </a:solidFill>
-            <a:ln w="12700">
-              <a:solidFill>
-                <a:schemeClr val="tx1"/>
-              </a:solidFill>
-            </a:ln>
-          </p:spPr>
-          <p:style>
-            <a:lnRef idx="2">
-              <a:schemeClr val="accent1">
-                <a:shade val="50000"/>
-              </a:schemeClr>
-            </a:lnRef>
-            <a:fillRef idx="1">
-              <a:schemeClr val="accent1"/>
-            </a:fillRef>
-            <a:effectRef idx="0">
-              <a:schemeClr val="accent1"/>
-            </a:effectRef>
-            <a:fontRef idx="minor">
-              <a:schemeClr val="lt1"/>
-            </a:fontRef>
-          </p:style>
-          <p:txBody>
-            <a:bodyPr rtlCol="0" anchor="ctr"/>
-            <a:lstStyle/>
-            <a:p>
-              <a:pPr algn="ctr"/>
-              <a:endParaRPr lang="zh-CN" altLang="en-US"/>
-            </a:p>
-          </p:txBody>
-        </p:sp>
-        <p:sp>
-          <p:nvSpPr>
-            <p:cNvPr id="15" name="文本框 14"/>
-            <p:cNvSpPr txBox="1"/>
-            <p:nvPr/>
-          </p:nvSpPr>
-          <p:spPr>
-            <a:xfrm>
-              <a:off x="7137" y="4594"/>
-              <a:ext cx="4398" cy="1006"/>
-            </a:xfrm>
-            <a:prstGeom prst="rect">
-              <a:avLst/>
-            </a:prstGeom>
-            <a:solidFill>
-              <a:schemeClr val="accent2">
-                <a:lumMod val="40000"/>
-                <a:lumOff val="60000"/>
-              </a:schemeClr>
-            </a:solidFill>
-          </p:spPr>
-          <p:txBody>
-            <a:bodyPr wrap="square" rtlCol="0" anchor="t">
-              <a:noAutofit/>
-            </a:bodyPr>
-            <a:lstStyle/>
-            <a:p>
-              <a:pPr algn="l"/>
-              <a:r>
-                <a:rPr lang="zh-CN" altLang="en-US">
-                  <a:sym typeface="+mn-ea"/>
-                </a:rPr>
-                <a:t>单个参数</a:t>
-              </a:r>
-              <a:r>
-                <a:rPr lang="en-US" altLang="zh-CN">
-                  <a:sym typeface="+mn-ea"/>
-                </a:rPr>
-                <a:t>          4</a:t>
-              </a:r>
-              <a:r>
-                <a:rPr lang="en-US" altLang="zh-CN">
-                  <a:sym typeface="+mn-ea"/>
-                </a:rPr>
-                <a:t>bits</a:t>
-              </a:r>
-              <a:endParaRPr lang="en-US" altLang="zh-CN">
-                <a:sym typeface="+mn-ea"/>
-              </a:endParaRPr>
-            </a:p>
-          </p:txBody>
-        </p:sp>
-      </p:grpSp>
-      <p:sp>
-        <p:nvSpPr>
-          <p:cNvPr id="26" name="文本框 25"/>
-          <p:cNvSpPr txBox="1"/>
-          <p:nvPr/>
-        </p:nvSpPr>
-        <p:spPr>
-          <a:xfrm>
-            <a:off x="9355455" y="3545205"/>
-            <a:ext cx="918845" cy="386080"/>
-          </a:xfrm>
-          <a:prstGeom prst="rect">
-            <a:avLst/>
-          </a:prstGeom>
-          <a:noFill/>
-          <a:extLst>
-            <a:ext uri="{909E8E84-426E-40DD-AFC4-6F175D3DCCD1}">
-              <a14:hiddenFill xmlns:a14="http://schemas.microsoft.com/office/drawing/2010/main">
-                <a:solidFill>
-                  <a:schemeClr val="accent2">
-                    <a:lumMod val="40000"/>
-                    <a:lumOff val="60000"/>
-                  </a:schemeClr>
-                </a:solidFill>
-              </a14:hiddenFill>
-            </a:ext>
-          </a:extLst>
-        </p:spPr>
-        <p:txBody>
-          <a:bodyPr wrap="square" rtlCol="0" anchor="t">
-            <a:noAutofit/>
-          </a:bodyPr>
-          <a:lstStyle/>
-          <a:p>
-            <a:pPr algn="l"/>
-            <a:r>
-              <a:rPr lang="en-US" altLang="zh-CN">
-                <a:sym typeface="+mn-ea"/>
-              </a:rPr>
-              <a:t>× 32</a:t>
-            </a:r>
-            <a:r>
-              <a:rPr lang="zh-CN" altLang="en-US">
-                <a:sym typeface="+mn-ea"/>
-              </a:rPr>
-              <a:t>个</a:t>
-            </a:r>
-            <a:endParaRPr lang="zh-CN" altLang="en-US">
-              <a:sym typeface="+mn-ea"/>
-            </a:endParaRPr>
-          </a:p>
-        </p:txBody>
-      </p:sp>
-      <p:sp>
-        <p:nvSpPr>
-          <p:cNvPr id="16" name="文本框 15"/>
-          <p:cNvSpPr txBox="1"/>
-          <p:nvPr/>
-        </p:nvSpPr>
-        <p:spPr>
-          <a:xfrm>
-            <a:off x="10469245" y="2699385"/>
-            <a:ext cx="918845" cy="386080"/>
-          </a:xfrm>
-          <a:prstGeom prst="rect">
-            <a:avLst/>
-          </a:prstGeom>
-          <a:noFill/>
-          <a:extLst>
-            <a:ext uri="{909E8E84-426E-40DD-AFC4-6F175D3DCCD1}">
-              <a14:hiddenFill xmlns:a14="http://schemas.microsoft.com/office/drawing/2010/main">
-                <a:solidFill>
-                  <a:schemeClr val="accent2">
-                    <a:lumMod val="40000"/>
-                    <a:lumOff val="60000"/>
-                  </a:schemeClr>
-                </a:solidFill>
-              </a14:hiddenFill>
-            </a:ext>
-          </a:extLst>
-        </p:spPr>
-        <p:txBody>
-          <a:bodyPr wrap="square" rtlCol="0" anchor="t">
-            <a:noAutofit/>
-          </a:bodyPr>
-          <a:lstStyle/>
-          <a:p>
-            <a:pPr algn="l"/>
-            <a:r>
-              <a:rPr lang="en-US" altLang="zh-CN">
-                <a:sym typeface="+mn-ea"/>
-              </a:rPr>
-              <a:t>× 8</a:t>
-            </a:r>
-            <a:r>
-              <a:rPr lang="zh-CN" altLang="en-US">
-                <a:sym typeface="+mn-ea"/>
-              </a:rPr>
-              <a:t>块</a:t>
-            </a:r>
-            <a:endParaRPr lang="zh-CN" altLang="en-US">
-              <a:sym typeface="+mn-ea"/>
-            </a:endParaRPr>
-          </a:p>
-        </p:txBody>
-      </p:sp>
-      <p:sp>
-        <p:nvSpPr>
-          <p:cNvPr id="33" name="文本框 32"/>
-          <p:cNvSpPr txBox="1"/>
-          <p:nvPr/>
-        </p:nvSpPr>
-        <p:spPr>
-          <a:xfrm>
-            <a:off x="6193155" y="1261110"/>
-            <a:ext cx="2541270" cy="386715"/>
-          </a:xfrm>
-          <a:prstGeom prst="rect">
-            <a:avLst/>
-          </a:prstGeom>
-          <a:noFill/>
-          <a:extLst>
-            <a:ext uri="{909E8E84-426E-40DD-AFC4-6F175D3DCCD1}">
-              <a14:hiddenFill xmlns:a14="http://schemas.microsoft.com/office/drawing/2010/main">
-                <a:solidFill>
-                  <a:schemeClr val="accent2">
-                    <a:lumMod val="40000"/>
-                    <a:lumOff val="60000"/>
-                  </a:schemeClr>
-                </a:solidFill>
-              </a14:hiddenFill>
-            </a:ext>
-          </a:extLst>
-        </p:spPr>
-        <p:txBody>
-          <a:bodyPr wrap="square" rtlCol="0" anchor="t">
-            <a:noAutofit/>
-          </a:bodyPr>
-          <a:lstStyle/>
-          <a:p>
-            <a:pPr algn="l"/>
-            <a:r>
-              <a:rPr lang="zh-CN" altLang="en-US">
-                <a:sym typeface="+mn-ea"/>
-              </a:rPr>
-              <a:t>子块</a:t>
-            </a:r>
-            <a:r>
-              <a:rPr lang="en-US" altLang="zh-CN">
-                <a:sym typeface="+mn-ea"/>
-              </a:rPr>
-              <a:t>  </a:t>
-            </a:r>
-            <a:r>
-              <a:rPr lang="zh-CN" altLang="en-US">
-                <a:sym typeface="+mn-ea"/>
-              </a:rPr>
-              <a:t>包含</a:t>
-            </a:r>
-            <a:r>
-              <a:rPr lang="en-US" altLang="zh-CN">
-                <a:sym typeface="+mn-ea"/>
-              </a:rPr>
-              <a:t>32</a:t>
-            </a:r>
-            <a:r>
-              <a:rPr lang="zh-CN" altLang="en-US">
-                <a:sym typeface="+mn-ea"/>
-              </a:rPr>
-              <a:t>个参数</a:t>
-            </a:r>
-            <a:endParaRPr lang="en-US" altLang="zh-CN">
-              <a:sym typeface="+mn-ea"/>
-            </a:endParaRPr>
-          </a:p>
-          <a:p>
-            <a:pPr algn="l"/>
-            <a:endParaRPr lang="en-US" altLang="zh-CN">
-              <a:sym typeface="+mn-ea"/>
-            </a:endParaRPr>
-          </a:p>
-        </p:txBody>
-      </p:sp>
-      <p:grpSp>
-        <p:nvGrpSpPr>
-          <p:cNvPr id="41" name="组合 40"/>
-          <p:cNvGrpSpPr/>
-          <p:nvPr/>
-        </p:nvGrpSpPr>
-        <p:grpSpPr>
-          <a:xfrm rot="0">
-            <a:off x="6274435" y="1866900"/>
-            <a:ext cx="3015615" cy="1401445"/>
-            <a:chOff x="10132" y="1885"/>
-            <a:chExt cx="4749" cy="2207"/>
-          </a:xfrm>
-        </p:grpSpPr>
-        <p:sp>
-          <p:nvSpPr>
-            <p:cNvPr id="36" name="矩形 35"/>
-            <p:cNvSpPr/>
-            <p:nvPr/>
-          </p:nvSpPr>
-          <p:spPr>
-            <a:xfrm>
-              <a:off x="10132" y="1885"/>
-              <a:ext cx="4748" cy="888"/>
-            </a:xfrm>
-            <a:prstGeom prst="rect">
-              <a:avLst/>
-            </a:prstGeom>
-            <a:solidFill>
-              <a:schemeClr val="accent1">
-                <a:lumMod val="40000"/>
-                <a:lumOff val="60000"/>
-              </a:schemeClr>
-            </a:solidFill>
-            <a:ln w="12700">
-              <a:solidFill>
-                <a:schemeClr val="tx1"/>
-              </a:solidFill>
-            </a:ln>
-          </p:spPr>
-          <p:style>
-            <a:lnRef idx="2">
-              <a:schemeClr val="accent1">
-                <a:shade val="50000"/>
-              </a:schemeClr>
-            </a:lnRef>
-            <a:fillRef idx="1">
-              <a:schemeClr val="accent1"/>
-            </a:fillRef>
-            <a:effectRef idx="0">
-              <a:schemeClr val="accent1"/>
-            </a:effectRef>
-            <a:fontRef idx="minor">
-              <a:schemeClr val="lt1"/>
-            </a:fontRef>
-          </p:style>
-          <p:txBody>
-            <a:bodyPr rtlCol="0" anchor="ctr"/>
-            <a:lstStyle/>
-            <a:p>
-              <a:pPr algn="ctr"/>
-              <a:endParaRPr lang="zh-CN" altLang="en-US"/>
-            </a:p>
-          </p:txBody>
-        </p:sp>
-        <p:sp>
-          <p:nvSpPr>
-            <p:cNvPr id="37" name="文本框 36"/>
-            <p:cNvSpPr txBox="1"/>
-            <p:nvPr/>
-          </p:nvSpPr>
-          <p:spPr>
-            <a:xfrm>
-              <a:off x="10242" y="2057"/>
-              <a:ext cx="4498" cy="661"/>
-            </a:xfrm>
-            <a:prstGeom prst="rect">
-              <a:avLst/>
-            </a:prstGeom>
-            <a:noFill/>
-            <a:ln>
-              <a:noFill/>
-            </a:ln>
-          </p:spPr>
-          <p:txBody>
-            <a:bodyPr wrap="square" rtlCol="0" anchor="t">
-              <a:noAutofit/>
-            </a:bodyPr>
-            <a:lstStyle/>
-            <a:p>
-              <a:pPr algn="l"/>
-              <a:r>
-                <a:rPr lang="zh-CN" altLang="en-US">
-                  <a:sym typeface="+mn-ea"/>
-                </a:rPr>
-                <a:t>子块</a:t>
-              </a:r>
-              <a:r>
-                <a:rPr lang="zh-CN" altLang="en-US"/>
-                <a:t>缩放因子</a:t>
-              </a:r>
-              <a:r>
-                <a:rPr lang="en-US" altLang="zh-CN"/>
-                <a:t> </a:t>
-              </a:r>
-              <a:r>
-                <a:rPr lang="en-US"/>
-                <a:t>6bits</a:t>
-              </a:r>
-              <a:r>
-                <a:rPr lang="en-US" altLang="zh-CN"/>
-                <a:t>  scales</a:t>
-              </a:r>
-              <a:endParaRPr lang="en-US" altLang="zh-CN"/>
-            </a:p>
-          </p:txBody>
-        </p:sp>
-        <p:sp>
-          <p:nvSpPr>
-            <p:cNvPr id="39" name="矩形 38"/>
-            <p:cNvSpPr/>
-            <p:nvPr/>
-          </p:nvSpPr>
-          <p:spPr>
-            <a:xfrm>
-              <a:off x="10133" y="3140"/>
-              <a:ext cx="4748" cy="888"/>
-            </a:xfrm>
-            <a:prstGeom prst="rect">
-              <a:avLst/>
-            </a:prstGeom>
-            <a:solidFill>
-              <a:schemeClr val="accent1">
-                <a:lumMod val="40000"/>
-                <a:lumOff val="60000"/>
-              </a:schemeClr>
-            </a:solidFill>
-            <a:ln w="12700">
-              <a:solidFill>
-                <a:schemeClr val="tx1"/>
-              </a:solidFill>
-            </a:ln>
-          </p:spPr>
-          <p:style>
-            <a:lnRef idx="2">
-              <a:schemeClr val="accent1">
-                <a:shade val="50000"/>
-              </a:schemeClr>
-            </a:lnRef>
-            <a:fillRef idx="1">
-              <a:schemeClr val="accent1"/>
-            </a:fillRef>
-            <a:effectRef idx="0">
-              <a:schemeClr val="accent1"/>
-            </a:effectRef>
-            <a:fontRef idx="minor">
-              <a:schemeClr val="lt1"/>
-            </a:fontRef>
-          </p:style>
-          <p:txBody>
-            <a:bodyPr rtlCol="0" anchor="ctr"/>
-            <a:lstStyle/>
-            <a:p>
-              <a:pPr algn="ctr"/>
-              <a:endParaRPr lang="zh-CN" altLang="en-US"/>
-            </a:p>
-          </p:txBody>
-        </p:sp>
-        <p:sp>
-          <p:nvSpPr>
-            <p:cNvPr id="40" name="文本框 39"/>
-            <p:cNvSpPr txBox="1"/>
-            <p:nvPr/>
-          </p:nvSpPr>
-          <p:spPr>
-            <a:xfrm>
-              <a:off x="10231" y="3294"/>
-              <a:ext cx="4498" cy="798"/>
-            </a:xfrm>
-            <a:prstGeom prst="rect">
-              <a:avLst/>
-            </a:prstGeom>
-            <a:noFill/>
-            <a:ln>
-              <a:noFill/>
-            </a:ln>
-          </p:spPr>
-          <p:txBody>
-            <a:bodyPr wrap="square" rtlCol="0" anchor="t">
-              <a:noAutofit/>
-            </a:bodyPr>
-            <a:lstStyle/>
-            <a:p>
-              <a:pPr algn="l"/>
-              <a:r>
-                <a:rPr lang="zh-CN" altLang="en-US">
-                  <a:sym typeface="+mn-ea"/>
-                </a:rPr>
-                <a:t>子块</a:t>
-              </a:r>
-              <a:r>
-                <a:rPr lang="zh-CN" altLang="en-US">
-                  <a:sym typeface="+mn-ea"/>
-                </a:rPr>
-                <a:t>最小值</a:t>
-              </a:r>
-              <a:r>
-                <a:rPr lang="en-US" altLang="zh-CN"/>
-                <a:t>     </a:t>
-              </a:r>
-              <a:r>
-                <a:rPr lang="en-US"/>
-                <a:t>6bits</a:t>
-              </a:r>
-              <a:r>
-                <a:rPr lang="en-US" altLang="zh-CN"/>
-                <a:t>   mins</a:t>
-              </a:r>
-              <a:endParaRPr lang="en-US" altLang="zh-CN"/>
-            </a:p>
-          </p:txBody>
-        </p:sp>
-      </p:grpSp>
+            <a:r>
+              <a:rPr lang="zh-CN" altLang="en-US" sz="900"/>
+              <a:t>测试集</a:t>
+            </a:r>
+            <a:endParaRPr lang="zh-CN" altLang="en-US" sz="900"/>
+          </a:p>
+        </p:txBody>
+      </p:sp>
     </p:spTree>
   </p:cSld>
   <p:clrMapOvr>
@@ -18429,6 +18544,13 @@
 
 <file path=ppt/tags/tag2.xml><?xml version="1.0" encoding="utf-8"?>
 <p:tagLst xmlns:p="http://schemas.openxmlformats.org/presentationml/2006/main">
+  <p:tag name="TABLE_ENDDRAG_ORIGIN_RECT" val="192*52"/>
+  <p:tag name="TABLE_ENDDRAG_RECT" val="212*36*192*52"/>
+</p:tagLst>
+</file>
+
+<file path=ppt/tags/tag3.xml><?xml version="1.0" encoding="utf-8"?>
+<p:tagLst xmlns:p="http://schemas.openxmlformats.org/presentationml/2006/main">
   <p:tag name="COMMONDATA" val="eyJoZGlkIjoiMjllZmI5NGRiYWI2ZDdkMDRmZDNiMGUwOWVjNmRmODYifQ=="/>
   <p:tag name="KSO_WPP_MARK_KEY" val="7792a17e-91d7-4c44-992a-cf0a45656bd2"/>
 </p:tagLst>

--- a/raws/画图.pptx
+++ b/raws/画图.pptx
@@ -4,6 +4,9 @@
   <p:sldMasterIdLst>
     <p:sldMasterId id="2147483648" r:id="rId1"/>
   </p:sldMasterIdLst>
+  <p:notesMasterIdLst>
+    <p:notesMasterId r:id="rId17"/>
+  </p:notesMasterIdLst>
   <p:sldIdLst>
     <p:sldId id="256" r:id="rId3"/>
     <p:sldId id="257" r:id="rId4"/>
@@ -23,7 +26,7 @@
   <p:sldSz cx="12192000" cy="6858000"/>
   <p:notesSz cx="6858000" cy="9144000"/>
   <p:custDataLst>
-    <p:tags r:id="rId20"/>
+    <p:tags r:id="rId21"/>
   </p:custDataLst>
   <p:defaultTextStyle>
     <a:defPPr>
@@ -121,6 +124,401 @@
     </a:lvl9pPr>
   </p:defaultTextStyle>
 </p:presentation>
+</file>
+
+<file path=ppt/notesMasters/notesMaster1.xml><?xml version="1.0" encoding="utf-8"?>
+<p:notesMaster xmlns:a="http://schemas.openxmlformats.org/drawingml/2006/main" xmlns:r="http://schemas.openxmlformats.org/officeDocument/2006/relationships" xmlns:p="http://schemas.openxmlformats.org/presentationml/2006/main">
+  <p:cSld>
+    <p:bg>
+      <p:bgRef idx="1001">
+        <a:schemeClr val="bg1"/>
+      </p:bgRef>
+    </p:bg>
+    <p:spTree>
+      <p:nvGrpSpPr>
+        <p:cNvPr id="1" name=""/>
+        <p:cNvGrpSpPr/>
+        <p:nvPr/>
+      </p:nvGrpSpPr>
+      <p:grpSpPr>
+        <a:xfrm>
+          <a:off x="0" y="0"/>
+          <a:ext cx="0" cy="0"/>
+          <a:chOff x="0" y="0"/>
+          <a:chExt cx="0" cy="0"/>
+        </a:xfrm>
+      </p:grpSpPr>
+      <p:sp>
+        <p:nvSpPr>
+          <p:cNvPr id="2" name="页眉占位符 1"/>
+          <p:cNvSpPr>
+            <a:spLocks noGrp="1"/>
+          </p:cNvSpPr>
+          <p:nvPr>
+            <p:ph type="hdr" sz="quarter"/>
+          </p:nvPr>
+        </p:nvSpPr>
+        <p:spPr>
+          <a:xfrm>
+            <a:off x="0" y="0"/>
+            <a:ext cx="2971800" cy="458788"/>
+          </a:xfrm>
+          <a:prstGeom prst="rect">
+            <a:avLst/>
+          </a:prstGeom>
+        </p:spPr>
+        <p:txBody>
+          <a:bodyPr vert="horz" lIns="91440" tIns="45720" rIns="91440" bIns="45720" rtlCol="0"/>
+          <a:lstStyle>
+            <a:lvl1pPr algn="l">
+              <a:defRPr sz="1200"/>
+            </a:lvl1pPr>
+          </a:lstStyle>
+          <a:p>
+            <a:endParaRPr lang="zh-CN" altLang="en-US"/>
+          </a:p>
+        </p:txBody>
+      </p:sp>
+      <p:sp>
+        <p:nvSpPr>
+          <p:cNvPr id="3" name="日期占位符 2"/>
+          <p:cNvSpPr>
+            <a:spLocks noGrp="1"/>
+          </p:cNvSpPr>
+          <p:nvPr>
+            <p:ph type="dt" idx="1"/>
+          </p:nvPr>
+        </p:nvSpPr>
+        <p:spPr>
+          <a:xfrm>
+            <a:off x="3884613" y="0"/>
+            <a:ext cx="2971800" cy="458788"/>
+          </a:xfrm>
+          <a:prstGeom prst="rect">
+            <a:avLst/>
+          </a:prstGeom>
+        </p:spPr>
+        <p:txBody>
+          <a:bodyPr vert="horz" lIns="91440" tIns="45720" rIns="91440" bIns="45720" rtlCol="0"/>
+          <a:lstStyle>
+            <a:lvl1pPr algn="r">
+              <a:defRPr sz="1200"/>
+            </a:lvl1pPr>
+          </a:lstStyle>
+          <a:p>
+            <a:fld id="{D2A48B96-639E-45A3-A0BA-2464DFDB1FAA}" type="datetimeFigureOut">
+              <a:rPr lang="zh-CN" altLang="en-US" smtClean="0"/>
+            </a:fld>
+            <a:endParaRPr lang="zh-CN" altLang="en-US"/>
+          </a:p>
+        </p:txBody>
+      </p:sp>
+      <p:sp>
+        <p:nvSpPr>
+          <p:cNvPr id="4" name="幻灯片图像占位符 3"/>
+          <p:cNvSpPr>
+            <a:spLocks noGrp="1" noRot="1" noChangeAspect="1"/>
+          </p:cNvSpPr>
+          <p:nvPr>
+            <p:ph type="sldImg" idx="2"/>
+          </p:nvPr>
+        </p:nvSpPr>
+        <p:spPr>
+          <a:xfrm>
+            <a:off x="685800" y="1143000"/>
+            <a:ext cx="5486400" cy="3086100"/>
+          </a:xfrm>
+          <a:prstGeom prst="rect">
+            <a:avLst/>
+          </a:prstGeom>
+          <a:noFill/>
+          <a:ln w="12700">
+            <a:solidFill>
+              <a:prstClr val="black"/>
+            </a:solidFill>
+          </a:ln>
+        </p:spPr>
+        <p:txBody>
+          <a:bodyPr vert="horz" lIns="91440" tIns="45720" rIns="91440" bIns="45720" rtlCol="0" anchor="ctr"/>
+          <a:lstStyle/>
+          <a:p>
+            <a:endParaRPr lang="zh-CN" altLang="en-US"/>
+          </a:p>
+        </p:txBody>
+      </p:sp>
+      <p:sp>
+        <p:nvSpPr>
+          <p:cNvPr id="5" name="备注占位符 4"/>
+          <p:cNvSpPr>
+            <a:spLocks noGrp="1"/>
+          </p:cNvSpPr>
+          <p:nvPr>
+            <p:ph type="body" sz="quarter" idx="3"/>
+          </p:nvPr>
+        </p:nvSpPr>
+        <p:spPr>
+          <a:xfrm>
+            <a:off x="685800" y="4400550"/>
+            <a:ext cx="5486400" cy="3600450"/>
+          </a:xfrm>
+          <a:prstGeom prst="rect">
+            <a:avLst/>
+          </a:prstGeom>
+        </p:spPr>
+        <p:txBody>
+          <a:bodyPr vert="horz" lIns="91440" tIns="45720" rIns="91440" bIns="45720" rtlCol="0"/>
+          <a:lstStyle/>
+          <a:p>
+            <a:pPr lvl="0"/>
+            <a:r>
+              <a:rPr lang="zh-CN" altLang="en-US" smtClean="0"/>
+              <a:t>单击此处编辑母版文本样式</a:t>
+            </a:r>
+            <a:endParaRPr lang="zh-CN" altLang="en-US" smtClean="0"/>
+          </a:p>
+          <a:p>
+            <a:pPr lvl="1"/>
+            <a:r>
+              <a:rPr lang="zh-CN" altLang="en-US" smtClean="0"/>
+              <a:t>第二级</a:t>
+            </a:r>
+            <a:endParaRPr lang="zh-CN" altLang="en-US" smtClean="0"/>
+          </a:p>
+          <a:p>
+            <a:pPr lvl="2"/>
+            <a:r>
+              <a:rPr lang="zh-CN" altLang="en-US" smtClean="0"/>
+              <a:t>第三级</a:t>
+            </a:r>
+            <a:endParaRPr lang="zh-CN" altLang="en-US" smtClean="0"/>
+          </a:p>
+          <a:p>
+            <a:pPr lvl="3"/>
+            <a:r>
+              <a:rPr lang="zh-CN" altLang="en-US" smtClean="0"/>
+              <a:t>第四级</a:t>
+            </a:r>
+            <a:endParaRPr lang="zh-CN" altLang="en-US" smtClean="0"/>
+          </a:p>
+          <a:p>
+            <a:pPr lvl="4"/>
+            <a:r>
+              <a:rPr lang="zh-CN" altLang="en-US" smtClean="0"/>
+              <a:t>第五级</a:t>
+            </a:r>
+            <a:endParaRPr lang="zh-CN" altLang="en-US"/>
+          </a:p>
+        </p:txBody>
+      </p:sp>
+      <p:sp>
+        <p:nvSpPr>
+          <p:cNvPr id="6" name="页脚占位符 5"/>
+          <p:cNvSpPr>
+            <a:spLocks noGrp="1"/>
+          </p:cNvSpPr>
+          <p:nvPr>
+            <p:ph type="ftr" sz="quarter" idx="4"/>
+          </p:nvPr>
+        </p:nvSpPr>
+        <p:spPr>
+          <a:xfrm>
+            <a:off x="0" y="8685213"/>
+            <a:ext cx="2971800" cy="458787"/>
+          </a:xfrm>
+          <a:prstGeom prst="rect">
+            <a:avLst/>
+          </a:prstGeom>
+        </p:spPr>
+        <p:txBody>
+          <a:bodyPr vert="horz" lIns="91440" tIns="45720" rIns="91440" bIns="45720" rtlCol="0" anchor="b"/>
+          <a:lstStyle>
+            <a:lvl1pPr algn="l">
+              <a:defRPr sz="1200"/>
+            </a:lvl1pPr>
+          </a:lstStyle>
+          <a:p>
+            <a:endParaRPr lang="zh-CN" altLang="en-US"/>
+          </a:p>
+        </p:txBody>
+      </p:sp>
+      <p:sp>
+        <p:nvSpPr>
+          <p:cNvPr id="7" name="灯片编号占位符 6"/>
+          <p:cNvSpPr>
+            <a:spLocks noGrp="1"/>
+          </p:cNvSpPr>
+          <p:nvPr>
+            <p:ph type="sldNum" sz="quarter" idx="5"/>
+          </p:nvPr>
+        </p:nvSpPr>
+        <p:spPr>
+          <a:xfrm>
+            <a:off x="3884613" y="8685213"/>
+            <a:ext cx="2971800" cy="458787"/>
+          </a:xfrm>
+          <a:prstGeom prst="rect">
+            <a:avLst/>
+          </a:prstGeom>
+        </p:spPr>
+        <p:txBody>
+          <a:bodyPr vert="horz" lIns="91440" tIns="45720" rIns="91440" bIns="45720" rtlCol="0" anchor="b"/>
+          <a:lstStyle>
+            <a:lvl1pPr algn="r">
+              <a:defRPr sz="1200"/>
+            </a:lvl1pPr>
+          </a:lstStyle>
+          <a:p>
+            <a:fld id="{A6837353-30EB-4A48-80EB-173D804AEFBD}" type="slidenum">
+              <a:rPr lang="zh-CN" altLang="en-US" smtClean="0"/>
+            </a:fld>
+            <a:endParaRPr lang="zh-CN" altLang="en-US"/>
+          </a:p>
+        </p:txBody>
+      </p:sp>
+    </p:spTree>
+  </p:cSld>
+  <p:clrMap bg1="lt1" tx1="dk1" bg2="lt2" tx2="dk2" accent1="accent1" accent2="accent2" accent3="accent3" accent4="accent4" accent5="accent5" accent6="accent6" hlink="hlink" folHlink="folHlink"/>
+  <p:notesStyle>
+    <a:lvl1pPr marL="0" algn="l" defTabSz="914400" rtl="0" eaLnBrk="1" latinLnBrk="0" hangingPunct="1">
+      <a:defRPr sz="1200" kern="1200">
+        <a:solidFill>
+          <a:schemeClr val="tx1"/>
+        </a:solidFill>
+        <a:latin typeface="+mn-lt"/>
+        <a:ea typeface="+mn-ea"/>
+        <a:cs typeface="+mn-cs"/>
+      </a:defRPr>
+    </a:lvl1pPr>
+    <a:lvl2pPr marL="457200" algn="l" defTabSz="914400" rtl="0" eaLnBrk="1" latinLnBrk="0" hangingPunct="1">
+      <a:defRPr sz="1200" kern="1200">
+        <a:solidFill>
+          <a:schemeClr val="tx1"/>
+        </a:solidFill>
+        <a:latin typeface="+mn-lt"/>
+        <a:ea typeface="+mn-ea"/>
+        <a:cs typeface="+mn-cs"/>
+      </a:defRPr>
+    </a:lvl2pPr>
+    <a:lvl3pPr marL="914400" algn="l" defTabSz="914400" rtl="0" eaLnBrk="1" latinLnBrk="0" hangingPunct="1">
+      <a:defRPr sz="1200" kern="1200">
+        <a:solidFill>
+          <a:schemeClr val="tx1"/>
+        </a:solidFill>
+        <a:latin typeface="+mn-lt"/>
+        <a:ea typeface="+mn-ea"/>
+        <a:cs typeface="+mn-cs"/>
+      </a:defRPr>
+    </a:lvl3pPr>
+    <a:lvl4pPr marL="1371600" algn="l" defTabSz="914400" rtl="0" eaLnBrk="1" latinLnBrk="0" hangingPunct="1">
+      <a:defRPr sz="1200" kern="1200">
+        <a:solidFill>
+          <a:schemeClr val="tx1"/>
+        </a:solidFill>
+        <a:latin typeface="+mn-lt"/>
+        <a:ea typeface="+mn-ea"/>
+        <a:cs typeface="+mn-cs"/>
+      </a:defRPr>
+    </a:lvl4pPr>
+    <a:lvl5pPr marL="1828800" algn="l" defTabSz="914400" rtl="0" eaLnBrk="1" latinLnBrk="0" hangingPunct="1">
+      <a:defRPr sz="1200" kern="1200">
+        <a:solidFill>
+          <a:schemeClr val="tx1"/>
+        </a:solidFill>
+        <a:latin typeface="+mn-lt"/>
+        <a:ea typeface="+mn-ea"/>
+        <a:cs typeface="+mn-cs"/>
+      </a:defRPr>
+    </a:lvl5pPr>
+    <a:lvl6pPr marL="2286000" algn="l" defTabSz="914400" rtl="0" eaLnBrk="1" latinLnBrk="0" hangingPunct="1">
+      <a:defRPr sz="1200" kern="1200">
+        <a:solidFill>
+          <a:schemeClr val="tx1"/>
+        </a:solidFill>
+        <a:latin typeface="+mn-lt"/>
+        <a:ea typeface="+mn-ea"/>
+        <a:cs typeface="+mn-cs"/>
+      </a:defRPr>
+    </a:lvl6pPr>
+    <a:lvl7pPr marL="2743200" algn="l" defTabSz="914400" rtl="0" eaLnBrk="1" latinLnBrk="0" hangingPunct="1">
+      <a:defRPr sz="1200" kern="1200">
+        <a:solidFill>
+          <a:schemeClr val="tx1"/>
+        </a:solidFill>
+        <a:latin typeface="+mn-lt"/>
+        <a:ea typeface="+mn-ea"/>
+        <a:cs typeface="+mn-cs"/>
+      </a:defRPr>
+    </a:lvl7pPr>
+    <a:lvl8pPr marL="3200400" algn="l" defTabSz="914400" rtl="0" eaLnBrk="1" latinLnBrk="0" hangingPunct="1">
+      <a:defRPr sz="1200" kern="1200">
+        <a:solidFill>
+          <a:schemeClr val="tx1"/>
+        </a:solidFill>
+        <a:latin typeface="+mn-lt"/>
+        <a:ea typeface="+mn-ea"/>
+        <a:cs typeface="+mn-cs"/>
+      </a:defRPr>
+    </a:lvl8pPr>
+    <a:lvl9pPr marL="3657600" algn="l" defTabSz="914400" rtl="0" eaLnBrk="1" latinLnBrk="0" hangingPunct="1">
+      <a:defRPr sz="1200" kern="1200">
+        <a:solidFill>
+          <a:schemeClr val="tx1"/>
+        </a:solidFill>
+        <a:latin typeface="+mn-lt"/>
+        <a:ea typeface="+mn-ea"/>
+        <a:cs typeface="+mn-cs"/>
+      </a:defRPr>
+    </a:lvl9pPr>
+  </p:notesStyle>
+</p:notesMaster>
+</file>
+
+<file path=ppt/notesSlides/notesSlide1.xml><?xml version="1.0" encoding="utf-8"?>
+<p:notes xmlns:a="http://schemas.openxmlformats.org/drawingml/2006/main" xmlns:r="http://schemas.openxmlformats.org/officeDocument/2006/relationships" xmlns:p="http://schemas.openxmlformats.org/presentationml/2006/main">
+  <p:cSld>
+    <p:spTree>
+      <p:nvGrpSpPr>
+        <p:cNvPr id="1" name=""/>
+        <p:cNvGrpSpPr/>
+        <p:nvPr/>
+      </p:nvGrpSpPr>
+      <p:grpSpPr/>
+      <p:sp>
+        <p:nvSpPr>
+          <p:cNvPr id="2" name="幻灯片图像占位符 1"/>
+          <p:cNvSpPr>
+            <a:spLocks noGrp="1"/>
+          </p:cNvSpPr>
+          <p:nvPr>
+            <p:ph type="sldImg" idx="2"/>
+          </p:nvPr>
+        </p:nvSpPr>
+        <p:spPr/>
+      </p:sp>
+      <p:sp>
+        <p:nvSpPr>
+          <p:cNvPr id="3" name="文本占位符 2"/>
+          <p:cNvSpPr>
+            <a:spLocks noGrp="1"/>
+          </p:cNvSpPr>
+          <p:nvPr>
+            <p:ph type="body" idx="3"/>
+          </p:nvPr>
+        </p:nvSpPr>
+        <p:spPr/>
+        <p:txBody>
+          <a:bodyPr/>
+          <a:p>
+            <a:endParaRPr lang="zh-CN" altLang="en-US"/>
+          </a:p>
+        </p:txBody>
+      </p:sp>
+    </p:spTree>
+  </p:cSld>
+  <p:clrMapOvr>
+    <a:masterClrMapping/>
+  </p:clrMapOvr>
+</p:notes>
 </file>
 
 <file path=ppt/slideLayouts/slideLayout1.xml><?xml version="1.0" encoding="utf-8"?>
@@ -4703,7 +5101,7 @@
           <a:lstStyle/>
           <a:p>
             <a:pPr algn="ctr"/>
-            <a:endParaRPr lang="zh-CN" altLang="en-US" sz="1200"/>
+            <a:endParaRPr lang="en-US" altLang="zh-CN" sz="1200"/>
           </a:p>
         </p:txBody>
       </p:sp>
@@ -8978,7 +9376,7 @@
           </p:nvPr>
         </p:nvGraphicFramePr>
         <p:xfrm>
-          <a:off x="2028190" y="400685"/>
+          <a:off x="1530985" y="1307465"/>
           <a:ext cx="2419350" cy="731520"/>
         </p:xfrm>
         <a:graphic>
@@ -9812,7 +10210,7 @@
         </p:nvSpPr>
         <p:spPr>
           <a:xfrm>
-            <a:off x="854075" y="614045"/>
+            <a:off x="295910" y="1511300"/>
             <a:ext cx="897890" cy="229870"/>
           </a:xfrm>
           <a:prstGeom prst="rect">
@@ -9848,7 +10246,7 @@
         </p:nvSpPr>
         <p:spPr>
           <a:xfrm>
-            <a:off x="5217795" y="400685"/>
+            <a:off x="295910" y="3034665"/>
             <a:ext cx="897890" cy="229870"/>
           </a:xfrm>
           <a:prstGeom prst="rect">
@@ -9884,7 +10282,7 @@
         </p:nvSpPr>
         <p:spPr>
           <a:xfrm>
-            <a:off x="8413115" y="436245"/>
+            <a:off x="295910" y="4740275"/>
             <a:ext cx="897890" cy="229870"/>
           </a:xfrm>
           <a:prstGeom prst="rect">
@@ -9909,6 +10307,2075 @@
               <a:t>测试集</a:t>
             </a:r>
             <a:endParaRPr lang="zh-CN" altLang="en-US" sz="900"/>
+          </a:p>
+        </p:txBody>
+      </p:sp>
+      <p:graphicFrame>
+        <p:nvGraphicFramePr>
+          <p:cNvPr id="4" name="表格 3"/>
+          <p:cNvGraphicFramePr/>
+          <p:nvPr/>
+        </p:nvGraphicFramePr>
+        <p:xfrm>
+          <a:off x="1530985" y="3034665"/>
+          <a:ext cx="2419350" cy="243840"/>
+        </p:xfrm>
+        <a:graphic>
+          <a:graphicData uri="http://schemas.openxmlformats.org/drawingml/2006/table">
+            <a:tbl>
+              <a:tblPr firstRow="1" bandRow="1">
+                <a:tableStyleId>{5C22544A-7EE6-4342-B048-85BDC9FD1C3A}</a:tableStyleId>
+              </a:tblPr>
+              <a:tblGrid>
+                <a:gridCol w="483870"/>
+                <a:gridCol w="483870"/>
+                <a:gridCol w="483870"/>
+                <a:gridCol w="483870"/>
+                <a:gridCol w="483870"/>
+              </a:tblGrid>
+              <a:tr h="243840">
+                <a:tc>
+                  <a:txBody>
+                    <a:bodyPr/>
+                    <a:p>
+                      <a:pPr algn="ctr">
+                        <a:buNone/>
+                      </a:pPr>
+                      <a:r>
+                        <a:rPr lang="zh-CN" altLang="en-US" sz="1000" b="0">
+                          <a:solidFill>
+                            <a:schemeClr val="tx1"/>
+                          </a:solidFill>
+                          <a:latin typeface="微软雅黑" panose="020B0503020204020204" charset="-122"/>
+                          <a:ea typeface="微软雅黑" panose="020B0503020204020204" charset="-122"/>
+                        </a:rPr>
+                        <a:t>今天</a:t>
+                      </a:r>
+                      <a:endParaRPr lang="zh-CN" altLang="en-US" sz="1000" b="0">
+                        <a:solidFill>
+                          <a:schemeClr val="tx1"/>
+                        </a:solidFill>
+                        <a:latin typeface="微软雅黑" panose="020B0503020204020204" charset="-122"/>
+                        <a:ea typeface="微软雅黑" panose="020B0503020204020204" charset="-122"/>
+                      </a:endParaRPr>
+                    </a:p>
+                  </a:txBody>
+                  <a:tcPr anchor="ctr" anchorCtr="0">
+                    <a:lnL w="12700" cmpd="sng">
+                      <a:solidFill>
+                        <a:schemeClr val="tx1"/>
+                      </a:solidFill>
+                      <a:prstDash val="solid"/>
+                    </a:lnL>
+                    <a:lnR w="12700" cmpd="sng">
+                      <a:solidFill>
+                        <a:schemeClr val="tx1"/>
+                      </a:solidFill>
+                      <a:prstDash val="solid"/>
+                    </a:lnR>
+                    <a:lnT w="12700" cmpd="sng">
+                      <a:solidFill>
+                        <a:schemeClr val="tx1"/>
+                      </a:solidFill>
+                      <a:prstDash val="solid"/>
+                    </a:lnT>
+                    <a:lnB w="12700" cmpd="sng">
+                      <a:solidFill>
+                        <a:schemeClr val="tx1"/>
+                      </a:solidFill>
+                      <a:prstDash val="solid"/>
+                    </a:lnB>
+                    <a:noFill/>
+                  </a:tcPr>
+                </a:tc>
+                <a:tc>
+                  <a:txBody>
+                    <a:bodyPr/>
+                    <a:p>
+                      <a:pPr algn="ctr">
+                        <a:buNone/>
+                      </a:pPr>
+                      <a:r>
+                        <a:rPr lang="zh-CN" altLang="en-US" sz="1000" b="0">
+                          <a:solidFill>
+                            <a:schemeClr val="tx1"/>
+                          </a:solidFill>
+                          <a:latin typeface="微软雅黑" panose="020B0503020204020204" charset="-122"/>
+                          <a:ea typeface="微软雅黑" panose="020B0503020204020204" charset="-122"/>
+                        </a:rPr>
+                        <a:t>天气</a:t>
+                      </a:r>
+                      <a:endParaRPr lang="zh-CN" altLang="en-US" sz="1000" b="0">
+                        <a:solidFill>
+                          <a:schemeClr val="tx1"/>
+                        </a:solidFill>
+                        <a:latin typeface="微软雅黑" panose="020B0503020204020204" charset="-122"/>
+                        <a:ea typeface="微软雅黑" panose="020B0503020204020204" charset="-122"/>
+                      </a:endParaRPr>
+                    </a:p>
+                  </a:txBody>
+                  <a:tcPr anchor="ctr" anchorCtr="0">
+                    <a:lnL w="12700" cmpd="sng">
+                      <a:solidFill>
+                        <a:schemeClr val="tx1"/>
+                      </a:solidFill>
+                      <a:prstDash val="solid"/>
+                    </a:lnL>
+                    <a:lnR w="12700" cmpd="sng">
+                      <a:solidFill>
+                        <a:schemeClr val="tx1"/>
+                      </a:solidFill>
+                      <a:prstDash val="solid"/>
+                    </a:lnR>
+                    <a:lnT w="12700" cmpd="sng">
+                      <a:solidFill>
+                        <a:schemeClr val="tx1"/>
+                      </a:solidFill>
+                      <a:prstDash val="solid"/>
+                    </a:lnT>
+                    <a:lnB w="12700" cmpd="sng">
+                      <a:solidFill>
+                        <a:schemeClr val="tx1"/>
+                      </a:solidFill>
+                      <a:prstDash val="solid"/>
+                    </a:lnB>
+                    <a:noFill/>
+                  </a:tcPr>
+                </a:tc>
+                <a:tc>
+                  <a:txBody>
+                    <a:bodyPr/>
+                    <a:p>
+                      <a:pPr algn="ctr">
+                        <a:buNone/>
+                      </a:pPr>
+                      <a:r>
+                        <a:rPr lang="zh-CN" altLang="en-US" sz="1000" b="0">
+                          <a:solidFill>
+                            <a:schemeClr val="tx1"/>
+                          </a:solidFill>
+                          <a:latin typeface="微软雅黑" panose="020B0503020204020204" charset="-122"/>
+                          <a:ea typeface="微软雅黑" panose="020B0503020204020204" charset="-122"/>
+                        </a:rPr>
+                        <a:t>很</a:t>
+                      </a:r>
+                      <a:endParaRPr lang="zh-CN" altLang="en-US" sz="1000" b="0">
+                        <a:solidFill>
+                          <a:schemeClr val="tx1"/>
+                        </a:solidFill>
+                        <a:latin typeface="微软雅黑" panose="020B0503020204020204" charset="-122"/>
+                        <a:ea typeface="微软雅黑" panose="020B0503020204020204" charset="-122"/>
+                      </a:endParaRPr>
+                    </a:p>
+                  </a:txBody>
+                  <a:tcPr anchor="ctr" anchorCtr="0">
+                    <a:lnL w="12700" cmpd="sng">
+                      <a:solidFill>
+                        <a:schemeClr val="tx1"/>
+                      </a:solidFill>
+                      <a:prstDash val="solid"/>
+                    </a:lnL>
+                    <a:lnR w="12700" cmpd="sng">
+                      <a:solidFill>
+                        <a:schemeClr val="tx1"/>
+                      </a:solidFill>
+                      <a:prstDash val="solid"/>
+                    </a:lnR>
+                    <a:lnT w="12700" cmpd="sng">
+                      <a:solidFill>
+                        <a:schemeClr val="tx1"/>
+                      </a:solidFill>
+                      <a:prstDash val="solid"/>
+                    </a:lnT>
+                    <a:lnB w="12700" cmpd="sng">
+                      <a:solidFill>
+                        <a:schemeClr val="tx1"/>
+                      </a:solidFill>
+                      <a:prstDash val="solid"/>
+                    </a:lnB>
+                    <a:noFill/>
+                  </a:tcPr>
+                </a:tc>
+                <a:tc>
+                  <a:txBody>
+                    <a:bodyPr/>
+                    <a:p>
+                      <a:pPr algn="ctr">
+                        <a:buNone/>
+                      </a:pPr>
+                      <a:r>
+                        <a:rPr lang="zh-CN" altLang="en-US" sz="1000" b="0">
+                          <a:solidFill>
+                            <a:schemeClr val="tx1"/>
+                          </a:solidFill>
+                          <a:latin typeface="微软雅黑" panose="020B0503020204020204" charset="-122"/>
+                          <a:ea typeface="微软雅黑" panose="020B0503020204020204" charset="-122"/>
+                        </a:rPr>
+                        <a:t>好</a:t>
+                      </a:r>
+                      <a:endParaRPr lang="zh-CN" altLang="en-US" sz="1000" b="0">
+                        <a:solidFill>
+                          <a:schemeClr val="tx1"/>
+                        </a:solidFill>
+                        <a:latin typeface="微软雅黑" panose="020B0503020204020204" charset="-122"/>
+                        <a:ea typeface="微软雅黑" panose="020B0503020204020204" charset="-122"/>
+                      </a:endParaRPr>
+                    </a:p>
+                  </a:txBody>
+                  <a:tcPr anchor="ctr" anchorCtr="0">
+                    <a:lnL w="12700" cmpd="sng">
+                      <a:solidFill>
+                        <a:schemeClr val="tx1"/>
+                      </a:solidFill>
+                      <a:prstDash val="solid"/>
+                    </a:lnL>
+                    <a:lnR w="12700" cmpd="sng">
+                      <a:solidFill>
+                        <a:schemeClr val="tx1"/>
+                      </a:solidFill>
+                      <a:prstDash val="solid"/>
+                    </a:lnR>
+                    <a:lnT w="12700" cmpd="sng">
+                      <a:solidFill>
+                        <a:schemeClr val="tx1"/>
+                      </a:solidFill>
+                      <a:prstDash val="solid"/>
+                    </a:lnT>
+                    <a:lnB w="12700" cmpd="sng">
+                      <a:solidFill>
+                        <a:schemeClr val="tx1"/>
+                      </a:solidFill>
+                      <a:prstDash val="solid"/>
+                    </a:lnB>
+                    <a:noFill/>
+                  </a:tcPr>
+                </a:tc>
+                <a:tc>
+                  <a:txBody>
+                    <a:bodyPr/>
+                    <a:p>
+                      <a:pPr algn="ctr">
+                        <a:buNone/>
+                      </a:pPr>
+                      <a:r>
+                        <a:rPr lang="zh-CN" altLang="en-US" sz="1000" b="0">
+                          <a:solidFill>
+                            <a:schemeClr val="tx1"/>
+                          </a:solidFill>
+                          <a:latin typeface="微软雅黑" panose="020B0503020204020204" charset="-122"/>
+                          <a:ea typeface="微软雅黑" panose="020B0503020204020204" charset="-122"/>
+                        </a:rPr>
+                        <a:t>呀</a:t>
+                      </a:r>
+                      <a:endParaRPr lang="zh-CN" altLang="en-US" sz="1000" b="0">
+                        <a:solidFill>
+                          <a:schemeClr val="tx1"/>
+                        </a:solidFill>
+                        <a:latin typeface="微软雅黑" panose="020B0503020204020204" charset="-122"/>
+                        <a:ea typeface="微软雅黑" panose="020B0503020204020204" charset="-122"/>
+                      </a:endParaRPr>
+                    </a:p>
+                  </a:txBody>
+                  <a:tcPr anchor="ctr" anchorCtr="0">
+                    <a:lnL w="12700" cmpd="sng">
+                      <a:solidFill>
+                        <a:schemeClr val="tx1"/>
+                      </a:solidFill>
+                      <a:prstDash val="solid"/>
+                    </a:lnL>
+                    <a:lnR w="12700" cmpd="sng">
+                      <a:solidFill>
+                        <a:schemeClr val="tx1"/>
+                      </a:solidFill>
+                      <a:prstDash val="solid"/>
+                    </a:lnR>
+                    <a:lnT w="12700" cmpd="sng">
+                      <a:solidFill>
+                        <a:schemeClr val="tx1"/>
+                      </a:solidFill>
+                      <a:prstDash val="solid"/>
+                    </a:lnT>
+                    <a:lnB w="12700" cmpd="sng">
+                      <a:solidFill>
+                        <a:schemeClr val="tx1"/>
+                      </a:solidFill>
+                      <a:prstDash val="solid"/>
+                    </a:lnB>
+                    <a:noFill/>
+                  </a:tcPr>
+                </a:tc>
+              </a:tr>
+            </a:tbl>
+          </a:graphicData>
+        </a:graphic>
+      </p:graphicFrame>
+      <p:graphicFrame>
+        <p:nvGraphicFramePr>
+          <p:cNvPr id="5" name="表格 4"/>
+          <p:cNvGraphicFramePr/>
+          <p:nvPr/>
+        </p:nvGraphicFramePr>
+        <p:xfrm>
+          <a:off x="1531620" y="4726305"/>
+          <a:ext cx="2419350" cy="243840"/>
+        </p:xfrm>
+        <a:graphic>
+          <a:graphicData uri="http://schemas.openxmlformats.org/drawingml/2006/table">
+            <a:tbl>
+              <a:tblPr firstRow="1" bandRow="1">
+                <a:tableStyleId>{5C22544A-7EE6-4342-B048-85BDC9FD1C3A}</a:tableStyleId>
+              </a:tblPr>
+              <a:tblGrid>
+                <a:gridCol w="483870"/>
+                <a:gridCol w="483870"/>
+                <a:gridCol w="483870"/>
+                <a:gridCol w="483870"/>
+                <a:gridCol w="483870"/>
+              </a:tblGrid>
+              <a:tr h="243840">
+                <a:tc>
+                  <a:txBody>
+                    <a:bodyPr/>
+                    <a:p>
+                      <a:pPr algn="ctr">
+                        <a:buNone/>
+                      </a:pPr>
+                      <a:r>
+                        <a:rPr lang="zh-CN" altLang="en-US" sz="1000" b="0">
+                          <a:solidFill>
+                            <a:schemeClr val="tx1"/>
+                          </a:solidFill>
+                          <a:latin typeface="微软雅黑" panose="020B0503020204020204" charset="-122"/>
+                          <a:ea typeface="微软雅黑" panose="020B0503020204020204" charset="-122"/>
+                        </a:rPr>
+                        <a:t>你好</a:t>
+                      </a:r>
+                      <a:endParaRPr lang="zh-CN" altLang="en-US" sz="1000" b="0">
+                        <a:solidFill>
+                          <a:schemeClr val="tx1"/>
+                        </a:solidFill>
+                        <a:latin typeface="微软雅黑" panose="020B0503020204020204" charset="-122"/>
+                        <a:ea typeface="微软雅黑" panose="020B0503020204020204" charset="-122"/>
+                      </a:endParaRPr>
+                    </a:p>
+                  </a:txBody>
+                  <a:tcPr anchor="ctr" anchorCtr="0">
+                    <a:lnL w="12700" cmpd="sng">
+                      <a:solidFill>
+                        <a:schemeClr val="tx1"/>
+                      </a:solidFill>
+                      <a:prstDash val="solid"/>
+                    </a:lnL>
+                    <a:lnR w="12700" cmpd="sng">
+                      <a:solidFill>
+                        <a:schemeClr val="tx1"/>
+                      </a:solidFill>
+                      <a:prstDash val="solid"/>
+                    </a:lnR>
+                    <a:lnT w="12700" cmpd="sng">
+                      <a:solidFill>
+                        <a:schemeClr val="tx1"/>
+                      </a:solidFill>
+                      <a:prstDash val="solid"/>
+                    </a:lnT>
+                    <a:lnB w="12700" cmpd="sng">
+                      <a:solidFill>
+                        <a:schemeClr val="tx1"/>
+                      </a:solidFill>
+                      <a:prstDash val="solid"/>
+                    </a:lnB>
+                    <a:noFill/>
+                  </a:tcPr>
+                </a:tc>
+                <a:tc>
+                  <a:txBody>
+                    <a:bodyPr/>
+                    <a:p>
+                      <a:pPr algn="ctr">
+                        <a:buNone/>
+                      </a:pPr>
+                      <a:r>
+                        <a:rPr lang="zh-CN" altLang="en-US" sz="1000" b="0">
+                          <a:solidFill>
+                            <a:schemeClr val="tx1"/>
+                          </a:solidFill>
+                          <a:latin typeface="微软雅黑" panose="020B0503020204020204" charset="-122"/>
+                          <a:ea typeface="微软雅黑" panose="020B0503020204020204" charset="-122"/>
+                        </a:rPr>
+                        <a:t>世界</a:t>
+                      </a:r>
+                      <a:endParaRPr lang="zh-CN" altLang="en-US" sz="1000" b="0">
+                        <a:solidFill>
+                          <a:schemeClr val="tx1"/>
+                        </a:solidFill>
+                        <a:latin typeface="微软雅黑" panose="020B0503020204020204" charset="-122"/>
+                        <a:ea typeface="微软雅黑" panose="020B0503020204020204" charset="-122"/>
+                      </a:endParaRPr>
+                    </a:p>
+                  </a:txBody>
+                  <a:tcPr anchor="ctr" anchorCtr="0">
+                    <a:lnL w="12700" cmpd="sng">
+                      <a:solidFill>
+                        <a:schemeClr val="tx1"/>
+                      </a:solidFill>
+                      <a:prstDash val="solid"/>
+                    </a:lnL>
+                    <a:lnR w="12700" cmpd="sng">
+                      <a:solidFill>
+                        <a:schemeClr val="tx1"/>
+                      </a:solidFill>
+                      <a:prstDash val="solid"/>
+                    </a:lnR>
+                    <a:lnT w="12700" cmpd="sng">
+                      <a:solidFill>
+                        <a:schemeClr val="tx1"/>
+                      </a:solidFill>
+                      <a:prstDash val="solid"/>
+                    </a:lnT>
+                    <a:lnB w="12700" cmpd="sng">
+                      <a:solidFill>
+                        <a:schemeClr val="tx1"/>
+                      </a:solidFill>
+                      <a:prstDash val="solid"/>
+                    </a:lnB>
+                    <a:noFill/>
+                  </a:tcPr>
+                </a:tc>
+                <a:tc>
+                  <a:txBody>
+                    <a:bodyPr/>
+                    <a:p>
+                      <a:pPr algn="ctr">
+                        <a:buNone/>
+                      </a:pPr>
+                      <a:r>
+                        <a:rPr lang="en-US" altLang="zh-CN" sz="1000" b="0">
+                          <a:solidFill>
+                            <a:schemeClr val="tx1"/>
+                          </a:solidFill>
+                          <a:latin typeface="微软雅黑" panose="020B0503020204020204" charset="-122"/>
+                          <a:ea typeface="微软雅黑" panose="020B0503020204020204" charset="-122"/>
+                        </a:rPr>
+                        <a:t>,</a:t>
+                      </a:r>
+                      <a:endParaRPr lang="en-US" altLang="zh-CN" sz="1000" b="0">
+                        <a:solidFill>
+                          <a:schemeClr val="tx1"/>
+                        </a:solidFill>
+                        <a:latin typeface="微软雅黑" panose="020B0503020204020204" charset="-122"/>
+                        <a:ea typeface="微软雅黑" panose="020B0503020204020204" charset="-122"/>
+                      </a:endParaRPr>
+                    </a:p>
+                  </a:txBody>
+                  <a:tcPr anchor="ctr" anchorCtr="0">
+                    <a:lnL w="12700" cmpd="sng">
+                      <a:solidFill>
+                        <a:schemeClr val="tx1"/>
+                      </a:solidFill>
+                      <a:prstDash val="solid"/>
+                    </a:lnL>
+                    <a:lnR w="12700" cmpd="sng">
+                      <a:solidFill>
+                        <a:schemeClr val="tx1"/>
+                      </a:solidFill>
+                      <a:prstDash val="solid"/>
+                    </a:lnR>
+                    <a:lnT w="12700" cmpd="sng">
+                      <a:solidFill>
+                        <a:schemeClr val="tx1"/>
+                      </a:solidFill>
+                      <a:prstDash val="solid"/>
+                    </a:lnT>
+                    <a:lnB w="12700" cmpd="sng">
+                      <a:solidFill>
+                        <a:schemeClr val="tx1"/>
+                      </a:solidFill>
+                      <a:prstDash val="solid"/>
+                    </a:lnB>
+                    <a:noFill/>
+                  </a:tcPr>
+                </a:tc>
+                <a:tc>
+                  <a:txBody>
+                    <a:bodyPr/>
+                    <a:p>
+                      <a:pPr algn="ctr">
+                        <a:buNone/>
+                      </a:pPr>
+                      <a:r>
+                        <a:rPr lang="zh-CN" altLang="en-US" sz="1000" b="0">
+                          <a:solidFill>
+                            <a:schemeClr val="tx1"/>
+                          </a:solidFill>
+                          <a:latin typeface="微软雅黑" panose="020B0503020204020204" charset="-122"/>
+                          <a:ea typeface="微软雅黑" panose="020B0503020204020204" charset="-122"/>
+                        </a:rPr>
+                        <a:t>你好</a:t>
+                      </a:r>
+                      <a:endParaRPr lang="zh-CN" altLang="en-US" sz="1000" b="0">
+                        <a:solidFill>
+                          <a:schemeClr val="tx1"/>
+                        </a:solidFill>
+                        <a:latin typeface="微软雅黑" panose="020B0503020204020204" charset="-122"/>
+                        <a:ea typeface="微软雅黑" panose="020B0503020204020204" charset="-122"/>
+                      </a:endParaRPr>
+                    </a:p>
+                  </a:txBody>
+                  <a:tcPr anchor="ctr" anchorCtr="0">
+                    <a:lnL w="12700" cmpd="sng">
+                      <a:solidFill>
+                        <a:schemeClr val="tx1"/>
+                      </a:solidFill>
+                      <a:prstDash val="solid"/>
+                    </a:lnL>
+                    <a:lnR w="12700" cmpd="sng">
+                      <a:solidFill>
+                        <a:schemeClr val="tx1"/>
+                      </a:solidFill>
+                      <a:prstDash val="solid"/>
+                    </a:lnR>
+                    <a:lnT w="12700" cmpd="sng">
+                      <a:solidFill>
+                        <a:schemeClr val="tx1"/>
+                      </a:solidFill>
+                      <a:prstDash val="solid"/>
+                    </a:lnT>
+                    <a:lnB w="12700" cmpd="sng">
+                      <a:solidFill>
+                        <a:schemeClr val="tx1"/>
+                      </a:solidFill>
+                      <a:prstDash val="solid"/>
+                    </a:lnB>
+                    <a:noFill/>
+                  </a:tcPr>
+                </a:tc>
+                <a:tc>
+                  <a:txBody>
+                    <a:bodyPr/>
+                    <a:p>
+                      <a:pPr algn="ctr">
+                        <a:buNone/>
+                      </a:pPr>
+                      <a:r>
+                        <a:rPr lang="en-US" altLang="zh-CN" sz="1000" b="0">
+                          <a:solidFill>
+                            <a:schemeClr val="tx1"/>
+                          </a:solidFill>
+                          <a:latin typeface="微软雅黑" panose="020B0503020204020204" charset="-122"/>
+                          <a:ea typeface="微软雅黑" panose="020B0503020204020204" charset="-122"/>
+                        </a:rPr>
+                        <a:t>AI</a:t>
+                      </a:r>
+                      <a:endParaRPr lang="en-US" altLang="zh-CN" sz="1000" b="0">
+                        <a:solidFill>
+                          <a:schemeClr val="tx1"/>
+                        </a:solidFill>
+                        <a:latin typeface="微软雅黑" panose="020B0503020204020204" charset="-122"/>
+                        <a:ea typeface="微软雅黑" panose="020B0503020204020204" charset="-122"/>
+                      </a:endParaRPr>
+                    </a:p>
+                  </a:txBody>
+                  <a:tcPr anchor="ctr" anchorCtr="0">
+                    <a:lnL w="12700" cmpd="sng">
+                      <a:solidFill>
+                        <a:schemeClr val="tx1"/>
+                      </a:solidFill>
+                      <a:prstDash val="solid"/>
+                    </a:lnL>
+                    <a:lnR w="12700" cmpd="sng">
+                      <a:solidFill>
+                        <a:schemeClr val="tx1"/>
+                      </a:solidFill>
+                      <a:prstDash val="solid"/>
+                    </a:lnR>
+                    <a:lnT w="12700" cmpd="sng">
+                      <a:solidFill>
+                        <a:schemeClr val="tx1"/>
+                      </a:solidFill>
+                      <a:prstDash val="solid"/>
+                    </a:lnT>
+                    <a:lnB w="12700" cmpd="sng">
+                      <a:solidFill>
+                        <a:schemeClr val="tx1"/>
+                      </a:solidFill>
+                      <a:prstDash val="solid"/>
+                    </a:lnB>
+                    <a:noFill/>
+                  </a:tcPr>
+                </a:tc>
+              </a:tr>
+            </a:tbl>
+          </a:graphicData>
+        </a:graphic>
+      </p:graphicFrame>
+      <p:sp>
+        <p:nvSpPr>
+          <p:cNvPr id="9" name="矩形 8"/>
+          <p:cNvSpPr/>
+          <p:nvPr/>
+        </p:nvSpPr>
+        <p:spPr>
+          <a:xfrm>
+            <a:off x="1487170" y="1558290"/>
+            <a:ext cx="2960370" cy="245110"/>
+          </a:xfrm>
+          <a:prstGeom prst="rect">
+            <a:avLst/>
+          </a:prstGeom>
+          <a:noFill/>
+          <a:extLst>
+            <a:ext uri="{909E8E84-426E-40DD-AFC4-6F175D3DCCD1}">
+              <a14:hiddenFill xmlns:a14="http://schemas.microsoft.com/office/drawing/2010/main">
+                <a:solidFill>
+                  <a:schemeClr val="accent1"/>
+                </a:solidFill>
+              </a14:hiddenFill>
+            </a:ext>
+          </a:extLst>
+        </p:spPr>
+        <p:style>
+          <a:lnRef idx="2">
+            <a:schemeClr val="accent1">
+              <a:lumMod val="75000"/>
+            </a:schemeClr>
+          </a:lnRef>
+          <a:fillRef idx="1">
+            <a:schemeClr val="accent1"/>
+          </a:fillRef>
+          <a:effectRef idx="0">
+            <a:srgbClr val="FFFFFF"/>
+          </a:effectRef>
+          <a:fontRef idx="minor">
+            <a:schemeClr val="lt1"/>
+          </a:fontRef>
+        </p:style>
+        <p:txBody>
+          <a:bodyPr rtlCol="0" anchor="ctr"/>
+          <a:p>
+            <a:pPr algn="ctr"/>
+            <a:endParaRPr lang="zh-CN" altLang="en-US"/>
+          </a:p>
+        </p:txBody>
+      </p:sp>
+      <p:sp>
+        <p:nvSpPr>
+          <p:cNvPr id="11" name="文本框 10"/>
+          <p:cNvSpPr txBox="1"/>
+          <p:nvPr/>
+        </p:nvSpPr>
+        <p:spPr>
+          <a:xfrm>
+            <a:off x="3950970" y="1558290"/>
+            <a:ext cx="496570" cy="245110"/>
+          </a:xfrm>
+          <a:prstGeom prst="rect">
+            <a:avLst/>
+          </a:prstGeom>
+          <a:noFill/>
+        </p:spPr>
+        <p:txBody>
+          <a:bodyPr wrap="square" rtlCol="0">
+            <a:spAutoFit/>
+          </a:bodyPr>
+          <a:p>
+            <a:r>
+              <a:rPr lang="en-US" altLang="zh-CN" sz="1000"/>
+              <a:t>Batch</a:t>
+            </a:r>
+            <a:endParaRPr lang="en-US" altLang="zh-CN" sz="1000"/>
+          </a:p>
+        </p:txBody>
+      </p:sp>
+      <p:sp>
+        <p:nvSpPr>
+          <p:cNvPr id="13" name="圆角矩形 12"/>
+          <p:cNvSpPr/>
+          <p:nvPr/>
+        </p:nvSpPr>
+        <p:spPr>
+          <a:xfrm>
+            <a:off x="7754938" y="1361440"/>
+            <a:ext cx="1480185" cy="533400"/>
+          </a:xfrm>
+          <a:prstGeom prst="roundRect">
+            <a:avLst/>
+          </a:prstGeom>
+          <a:solidFill>
+            <a:schemeClr val="accent4">
+              <a:lumMod val="60000"/>
+              <a:lumOff val="40000"/>
+            </a:schemeClr>
+          </a:solidFill>
+          <a:ln>
+            <a:noFill/>
+          </a:ln>
+        </p:spPr>
+        <p:style>
+          <a:lnRef idx="2">
+            <a:schemeClr val="accent1">
+              <a:lumMod val="75000"/>
+            </a:schemeClr>
+          </a:lnRef>
+          <a:fillRef idx="1">
+            <a:schemeClr val="accent1"/>
+          </a:fillRef>
+          <a:effectRef idx="0">
+            <a:srgbClr val="FFFFFF"/>
+          </a:effectRef>
+          <a:fontRef idx="minor">
+            <a:schemeClr val="lt1"/>
+          </a:fontRef>
+        </p:style>
+        <p:txBody>
+          <a:bodyPr rtlCol="0" anchor="ctr"/>
+          <a:p>
+            <a:pPr algn="ctr"/>
+            <a:r>
+              <a:rPr lang="zh-CN" altLang="en-US" sz="1000">
+                <a:solidFill>
+                  <a:schemeClr val="tx1"/>
+                </a:solidFill>
+              </a:rPr>
+              <a:t>多层神经网络</a:t>
+            </a:r>
+            <a:endParaRPr lang="zh-CN" altLang="en-US" sz="1000">
+              <a:solidFill>
+                <a:schemeClr val="tx1"/>
+              </a:solidFill>
+            </a:endParaRPr>
+          </a:p>
+          <a:p>
+            <a:pPr algn="ctr"/>
+            <a:r>
+              <a:rPr lang="zh-CN" altLang="en-US" sz="1000">
+                <a:solidFill>
+                  <a:schemeClr val="tx1"/>
+                </a:solidFill>
+              </a:rPr>
+              <a:t>内含大量参数</a:t>
+            </a:r>
+            <a:endParaRPr lang="zh-CN" altLang="en-US" sz="1000">
+              <a:solidFill>
+                <a:schemeClr val="tx1"/>
+              </a:solidFill>
+            </a:endParaRPr>
+          </a:p>
+        </p:txBody>
+      </p:sp>
+      <p:sp>
+        <p:nvSpPr>
+          <p:cNvPr id="22" name="圆角矩形 21"/>
+          <p:cNvSpPr/>
+          <p:nvPr/>
+        </p:nvSpPr>
+        <p:spPr>
+          <a:xfrm>
+            <a:off x="7754938" y="2357120"/>
+            <a:ext cx="1480185" cy="243205"/>
+          </a:xfrm>
+          <a:prstGeom prst="roundRect">
+            <a:avLst/>
+          </a:prstGeom>
+          <a:solidFill>
+            <a:schemeClr val="accent6">
+              <a:lumMod val="60000"/>
+              <a:lumOff val="40000"/>
+            </a:schemeClr>
+          </a:solidFill>
+          <a:ln>
+            <a:noFill/>
+          </a:ln>
+        </p:spPr>
+        <p:style>
+          <a:lnRef idx="2">
+            <a:schemeClr val="accent1">
+              <a:lumMod val="75000"/>
+            </a:schemeClr>
+          </a:lnRef>
+          <a:fillRef idx="1">
+            <a:schemeClr val="accent1"/>
+          </a:fillRef>
+          <a:effectRef idx="0">
+            <a:srgbClr val="FFFFFF"/>
+          </a:effectRef>
+          <a:fontRef idx="minor">
+            <a:schemeClr val="lt1"/>
+          </a:fontRef>
+        </p:style>
+        <p:txBody>
+          <a:bodyPr rtlCol="0" anchor="ctr"/>
+          <a:p>
+            <a:pPr algn="ctr"/>
+            <a:r>
+              <a:rPr lang="en-US" altLang="zh-CN" sz="1000">
+                <a:solidFill>
+                  <a:schemeClr val="tx1"/>
+                </a:solidFill>
+              </a:rPr>
+              <a:t>Softmax</a:t>
+            </a:r>
+            <a:r>
+              <a:rPr lang="zh-CN" altLang="en-US" sz="1000">
+                <a:solidFill>
+                  <a:schemeClr val="tx1"/>
+                </a:solidFill>
+              </a:rPr>
+              <a:t>归一化函数</a:t>
+            </a:r>
+            <a:endParaRPr lang="zh-CN" altLang="en-US" sz="1000">
+              <a:solidFill>
+                <a:schemeClr val="tx1"/>
+              </a:solidFill>
+            </a:endParaRPr>
+          </a:p>
+        </p:txBody>
+      </p:sp>
+      <p:sp>
+        <p:nvSpPr>
+          <p:cNvPr id="23" name="右箭头 26"/>
+          <p:cNvSpPr/>
+          <p:nvPr/>
+        </p:nvSpPr>
+        <p:spPr>
+          <a:xfrm rot="5400000">
+            <a:off x="8317230" y="2034540"/>
+            <a:ext cx="355600" cy="182245"/>
+          </a:xfrm>
+          <a:prstGeom prst="rightArrow">
+            <a:avLst/>
+          </a:prstGeom>
+          <a:ln>
+            <a:noFill/>
+          </a:ln>
+        </p:spPr>
+        <p:style>
+          <a:lnRef idx="2">
+            <a:schemeClr val="accent1">
+              <a:shade val="50000"/>
+            </a:schemeClr>
+          </a:lnRef>
+          <a:fillRef idx="1">
+            <a:schemeClr val="accent1"/>
+          </a:fillRef>
+          <a:effectRef idx="0">
+            <a:schemeClr val="accent1"/>
+          </a:effectRef>
+          <a:fontRef idx="minor">
+            <a:schemeClr val="lt1"/>
+          </a:fontRef>
+        </p:style>
+        <p:txBody>
+          <a:bodyPr rtlCol="0" anchor="ctr"/>
+          <a:p>
+            <a:pPr algn="ctr"/>
+            <a:endParaRPr lang="en-US" altLang="zh-CN" sz="1200"/>
+          </a:p>
+        </p:txBody>
+      </p:sp>
+      <p:sp>
+        <p:nvSpPr>
+          <p:cNvPr id="24" name="文本框 23"/>
+          <p:cNvSpPr txBox="1"/>
+          <p:nvPr/>
+        </p:nvSpPr>
+        <p:spPr>
+          <a:xfrm>
+            <a:off x="5318125" y="1215390"/>
+            <a:ext cx="1250315" cy="266065"/>
+          </a:xfrm>
+          <a:prstGeom prst="rect">
+            <a:avLst/>
+          </a:prstGeom>
+          <a:noFill/>
+        </p:spPr>
+        <p:txBody>
+          <a:bodyPr wrap="square" rtlCol="0">
+            <a:noAutofit/>
+          </a:bodyPr>
+          <a:p>
+            <a:r>
+              <a:rPr lang="zh-CN" altLang="en-US" sz="1000" dirty="0"/>
+              <a:t>转换为</a:t>
+            </a:r>
+            <a:r>
+              <a:rPr lang="en-US" altLang="zh-CN" sz="1000" dirty="0"/>
+              <a:t>token</a:t>
+            </a:r>
+            <a:r>
+              <a:rPr lang="zh-CN" altLang="en-US" sz="1000" dirty="0"/>
+              <a:t>序列</a:t>
+            </a:r>
+            <a:endParaRPr lang="zh-CN" altLang="en-US" sz="1000" dirty="0"/>
+          </a:p>
+        </p:txBody>
+      </p:sp>
+      <p:sp>
+        <p:nvSpPr>
+          <p:cNvPr id="25" name="文本框 24"/>
+          <p:cNvSpPr txBox="1"/>
+          <p:nvPr/>
+        </p:nvSpPr>
+        <p:spPr>
+          <a:xfrm>
+            <a:off x="8552815" y="1992630"/>
+            <a:ext cx="1402715" cy="266065"/>
+          </a:xfrm>
+          <a:prstGeom prst="rect">
+            <a:avLst/>
+          </a:prstGeom>
+          <a:noFill/>
+        </p:spPr>
+        <p:txBody>
+          <a:bodyPr wrap="square" rtlCol="0">
+            <a:noAutofit/>
+          </a:bodyPr>
+          <a:p>
+            <a:r>
+              <a:rPr lang="en-US" altLang="zh-CN" sz="1000" dirty="0"/>
+              <a:t>logits</a:t>
+            </a:r>
+            <a:r>
+              <a:rPr lang="zh-CN" altLang="en-US" sz="1000" dirty="0"/>
+              <a:t>词分数</a:t>
+            </a:r>
+            <a:r>
+              <a:rPr lang="zh-CN" altLang="en-US" sz="1000" dirty="0"/>
+              <a:t>向量</a:t>
+            </a:r>
+            <a:endParaRPr lang="zh-CN" altLang="en-US" sz="1000" dirty="0"/>
+          </a:p>
+        </p:txBody>
+      </p:sp>
+      <p:sp>
+        <p:nvSpPr>
+          <p:cNvPr id="26" name="圆角矩形 25"/>
+          <p:cNvSpPr/>
+          <p:nvPr/>
+        </p:nvSpPr>
+        <p:spPr>
+          <a:xfrm>
+            <a:off x="7754938" y="3113405"/>
+            <a:ext cx="1480185" cy="243205"/>
+          </a:xfrm>
+          <a:prstGeom prst="roundRect">
+            <a:avLst/>
+          </a:prstGeom>
+          <a:solidFill>
+            <a:schemeClr val="accent2">
+              <a:lumMod val="60000"/>
+              <a:lumOff val="40000"/>
+            </a:schemeClr>
+          </a:solidFill>
+          <a:ln>
+            <a:noFill/>
+          </a:ln>
+        </p:spPr>
+        <p:style>
+          <a:lnRef idx="2">
+            <a:schemeClr val="accent1">
+              <a:lumMod val="75000"/>
+            </a:schemeClr>
+          </a:lnRef>
+          <a:fillRef idx="1">
+            <a:schemeClr val="accent1"/>
+          </a:fillRef>
+          <a:effectRef idx="0">
+            <a:srgbClr val="FFFFFF"/>
+          </a:effectRef>
+          <a:fontRef idx="minor">
+            <a:schemeClr val="lt1"/>
+          </a:fontRef>
+        </p:style>
+        <p:txBody>
+          <a:bodyPr rtlCol="0" anchor="ctr"/>
+          <a:p>
+            <a:pPr algn="ctr"/>
+            <a:r>
+              <a:rPr lang="zh-CN" altLang="en-US" sz="1000">
+                <a:solidFill>
+                  <a:schemeClr val="tx1"/>
+                </a:solidFill>
+                <a:sym typeface="+mn-ea"/>
+              </a:rPr>
+              <a:t>交叉熵</a:t>
+            </a:r>
+            <a:r>
+              <a:rPr lang="en-US" altLang="zh-CN" sz="1000">
+                <a:solidFill>
+                  <a:schemeClr val="tx1"/>
+                </a:solidFill>
+                <a:sym typeface="+mn-ea"/>
+              </a:rPr>
+              <a:t> </a:t>
+            </a:r>
+            <a:r>
+              <a:rPr lang="zh-CN" altLang="en-US" sz="1000">
+                <a:solidFill>
+                  <a:schemeClr val="tx1"/>
+                </a:solidFill>
+              </a:rPr>
+              <a:t>损失函数</a:t>
+            </a:r>
+            <a:endParaRPr lang="zh-CN" altLang="en-US" sz="1000">
+              <a:solidFill>
+                <a:schemeClr val="tx1"/>
+              </a:solidFill>
+            </a:endParaRPr>
+          </a:p>
+        </p:txBody>
+      </p:sp>
+      <p:sp>
+        <p:nvSpPr>
+          <p:cNvPr id="28" name="右箭头 26"/>
+          <p:cNvSpPr/>
+          <p:nvPr/>
+        </p:nvSpPr>
+        <p:spPr>
+          <a:xfrm rot="5400000">
+            <a:off x="8317230" y="2765425"/>
+            <a:ext cx="355600" cy="182245"/>
+          </a:xfrm>
+          <a:prstGeom prst="rightArrow">
+            <a:avLst/>
+          </a:prstGeom>
+          <a:ln>
+            <a:noFill/>
+          </a:ln>
+        </p:spPr>
+        <p:style>
+          <a:lnRef idx="2">
+            <a:schemeClr val="accent1">
+              <a:shade val="50000"/>
+            </a:schemeClr>
+          </a:lnRef>
+          <a:fillRef idx="1">
+            <a:schemeClr val="accent1"/>
+          </a:fillRef>
+          <a:effectRef idx="0">
+            <a:schemeClr val="accent1"/>
+          </a:effectRef>
+          <a:fontRef idx="minor">
+            <a:schemeClr val="lt1"/>
+          </a:fontRef>
+        </p:style>
+        <p:txBody>
+          <a:bodyPr rtlCol="0" anchor="ctr"/>
+          <a:p>
+            <a:pPr algn="ctr"/>
+            <a:endParaRPr lang="en-US" altLang="zh-CN" sz="1200"/>
+          </a:p>
+        </p:txBody>
+      </p:sp>
+      <p:sp>
+        <p:nvSpPr>
+          <p:cNvPr id="30" name="文本框 29"/>
+          <p:cNvSpPr txBox="1"/>
+          <p:nvPr/>
+        </p:nvSpPr>
+        <p:spPr>
+          <a:xfrm>
+            <a:off x="8552815" y="2710180"/>
+            <a:ext cx="918210" cy="266065"/>
+          </a:xfrm>
+          <a:prstGeom prst="rect">
+            <a:avLst/>
+          </a:prstGeom>
+          <a:noFill/>
+        </p:spPr>
+        <p:txBody>
+          <a:bodyPr wrap="square" rtlCol="0">
+            <a:noAutofit/>
+          </a:bodyPr>
+          <a:p>
+            <a:r>
+              <a:rPr lang="zh-CN" altLang="en-US" sz="1000" dirty="0"/>
+              <a:t>词</a:t>
+            </a:r>
+            <a:r>
+              <a:rPr lang="zh-CN" altLang="en-US" sz="1000" dirty="0"/>
+              <a:t>概率向量</a:t>
+            </a:r>
+            <a:endParaRPr lang="zh-CN" altLang="en-US" sz="1000" dirty="0"/>
+          </a:p>
+        </p:txBody>
+      </p:sp>
+      <p:sp>
+        <p:nvSpPr>
+          <p:cNvPr id="31" name="右箭头 26"/>
+          <p:cNvSpPr/>
+          <p:nvPr/>
+        </p:nvSpPr>
+        <p:spPr>
+          <a:xfrm rot="5400000">
+            <a:off x="8317230" y="3521710"/>
+            <a:ext cx="355600" cy="182245"/>
+          </a:xfrm>
+          <a:prstGeom prst="rightArrow">
+            <a:avLst/>
+          </a:prstGeom>
+          <a:ln>
+            <a:noFill/>
+          </a:ln>
+        </p:spPr>
+        <p:style>
+          <a:lnRef idx="2">
+            <a:schemeClr val="accent1">
+              <a:shade val="50000"/>
+            </a:schemeClr>
+          </a:lnRef>
+          <a:fillRef idx="1">
+            <a:schemeClr val="accent1"/>
+          </a:fillRef>
+          <a:effectRef idx="0">
+            <a:schemeClr val="accent1"/>
+          </a:effectRef>
+          <a:fontRef idx="minor">
+            <a:schemeClr val="lt1"/>
+          </a:fontRef>
+        </p:style>
+        <p:txBody>
+          <a:bodyPr rtlCol="0" anchor="ctr"/>
+          <a:p>
+            <a:pPr algn="ctr"/>
+            <a:endParaRPr lang="en-US" altLang="zh-CN" sz="1200"/>
+          </a:p>
+        </p:txBody>
+      </p:sp>
+      <p:sp>
+        <p:nvSpPr>
+          <p:cNvPr id="32" name="文本框 31"/>
+          <p:cNvSpPr txBox="1"/>
+          <p:nvPr/>
+        </p:nvSpPr>
+        <p:spPr>
+          <a:xfrm>
+            <a:off x="8552815" y="3427730"/>
+            <a:ext cx="584835" cy="266065"/>
+          </a:xfrm>
+          <a:prstGeom prst="rect">
+            <a:avLst/>
+          </a:prstGeom>
+          <a:noFill/>
+        </p:spPr>
+        <p:txBody>
+          <a:bodyPr wrap="square" rtlCol="0">
+            <a:noAutofit/>
+          </a:bodyPr>
+          <a:p>
+            <a:r>
+              <a:rPr lang="en-US" altLang="zh-CN" sz="1000" dirty="0"/>
+              <a:t>Loss</a:t>
+            </a:r>
+            <a:r>
+              <a:rPr lang="zh-CN" altLang="en-US" sz="1000" dirty="0"/>
+              <a:t>值</a:t>
+            </a:r>
+            <a:endParaRPr lang="en-US" altLang="zh-CN" sz="1000" dirty="0"/>
+          </a:p>
+        </p:txBody>
+      </p:sp>
+      <p:sp>
+        <p:nvSpPr>
+          <p:cNvPr id="33" name="圆角矩形 32"/>
+          <p:cNvSpPr/>
+          <p:nvPr/>
+        </p:nvSpPr>
+        <p:spPr>
+          <a:xfrm>
+            <a:off x="7796213" y="3989070"/>
+            <a:ext cx="1397635" cy="243205"/>
+          </a:xfrm>
+          <a:prstGeom prst="roundRect">
+            <a:avLst/>
+          </a:prstGeom>
+          <a:solidFill>
+            <a:schemeClr val="accent4">
+              <a:lumMod val="20000"/>
+              <a:lumOff val="80000"/>
+            </a:schemeClr>
+          </a:solidFill>
+          <a:ln>
+            <a:noFill/>
+          </a:ln>
+        </p:spPr>
+        <p:style>
+          <a:lnRef idx="2">
+            <a:schemeClr val="accent1">
+              <a:lumMod val="75000"/>
+            </a:schemeClr>
+          </a:lnRef>
+          <a:fillRef idx="1">
+            <a:schemeClr val="accent1"/>
+          </a:fillRef>
+          <a:effectRef idx="0">
+            <a:srgbClr val="FFFFFF"/>
+          </a:effectRef>
+          <a:fontRef idx="minor">
+            <a:schemeClr val="lt1"/>
+          </a:fontRef>
+        </p:style>
+        <p:txBody>
+          <a:bodyPr rtlCol="0" anchor="ctr"/>
+          <a:p>
+            <a:pPr algn="ctr"/>
+            <a:r>
+              <a:rPr lang="zh-CN" altLang="en-US" sz="1000">
+                <a:solidFill>
+                  <a:schemeClr val="tx1"/>
+                </a:solidFill>
+              </a:rPr>
+              <a:t>反向传播</a:t>
+            </a:r>
+            <a:endParaRPr lang="zh-CN" altLang="en-US" sz="1000">
+              <a:solidFill>
+                <a:schemeClr val="tx1"/>
+              </a:solidFill>
+            </a:endParaRPr>
+          </a:p>
+        </p:txBody>
+      </p:sp>
+      <p:sp>
+        <p:nvSpPr>
+          <p:cNvPr id="35" name="右箭头 26"/>
+          <p:cNvSpPr/>
+          <p:nvPr/>
+        </p:nvSpPr>
+        <p:spPr>
+          <a:xfrm rot="5400000">
+            <a:off x="8315960" y="4421505"/>
+            <a:ext cx="355600" cy="182245"/>
+          </a:xfrm>
+          <a:prstGeom prst="rightArrow">
+            <a:avLst/>
+          </a:prstGeom>
+          <a:ln>
+            <a:noFill/>
+          </a:ln>
+        </p:spPr>
+        <p:style>
+          <a:lnRef idx="2">
+            <a:schemeClr val="accent1">
+              <a:shade val="50000"/>
+            </a:schemeClr>
+          </a:lnRef>
+          <a:fillRef idx="1">
+            <a:schemeClr val="accent1"/>
+          </a:fillRef>
+          <a:effectRef idx="0">
+            <a:schemeClr val="accent1"/>
+          </a:effectRef>
+          <a:fontRef idx="minor">
+            <a:schemeClr val="lt1"/>
+          </a:fontRef>
+        </p:style>
+        <p:txBody>
+          <a:bodyPr rtlCol="0" anchor="ctr"/>
+          <a:p>
+            <a:pPr algn="ctr"/>
+            <a:endParaRPr lang="en-US" altLang="zh-CN" sz="1200"/>
+          </a:p>
+        </p:txBody>
+      </p:sp>
+      <p:sp>
+        <p:nvSpPr>
+          <p:cNvPr id="36" name="文本框 35"/>
+          <p:cNvSpPr txBox="1"/>
+          <p:nvPr/>
+        </p:nvSpPr>
+        <p:spPr>
+          <a:xfrm>
+            <a:off x="8589010" y="4342765"/>
+            <a:ext cx="1228090" cy="266065"/>
+          </a:xfrm>
+          <a:prstGeom prst="rect">
+            <a:avLst/>
+          </a:prstGeom>
+          <a:noFill/>
+        </p:spPr>
+        <p:txBody>
+          <a:bodyPr wrap="square" rtlCol="0">
+            <a:noAutofit/>
+          </a:bodyPr>
+          <a:p>
+            <a:r>
+              <a:rPr lang="zh-CN" altLang="en-US" sz="1000" dirty="0"/>
+              <a:t>每个参数的</a:t>
+            </a:r>
+            <a:r>
+              <a:rPr lang="zh-CN" altLang="en-US" sz="1000" dirty="0"/>
+              <a:t>梯度值</a:t>
+            </a:r>
+            <a:endParaRPr lang="zh-CN" altLang="en-US" sz="1000" dirty="0"/>
+          </a:p>
+        </p:txBody>
+      </p:sp>
+      <p:grpSp>
+        <p:nvGrpSpPr>
+          <p:cNvPr id="46" name="组合 45"/>
+          <p:cNvGrpSpPr/>
+          <p:nvPr/>
+        </p:nvGrpSpPr>
+        <p:grpSpPr>
+          <a:xfrm>
+            <a:off x="7395210" y="4742815"/>
+            <a:ext cx="2195830" cy="972820"/>
+            <a:chOff x="3075" y="7461"/>
+            <a:chExt cx="3458" cy="1532"/>
+          </a:xfrm>
+        </p:grpSpPr>
+        <p:sp>
+          <p:nvSpPr>
+            <p:cNvPr id="39" name="圆角矩形 38"/>
+            <p:cNvSpPr/>
+            <p:nvPr/>
+          </p:nvSpPr>
+          <p:spPr>
+            <a:xfrm>
+              <a:off x="3075" y="7461"/>
+              <a:ext cx="3459" cy="1533"/>
+            </a:xfrm>
+            <a:prstGeom prst="roundRect">
+              <a:avLst/>
+            </a:prstGeom>
+            <a:solidFill>
+              <a:schemeClr val="accent5">
+                <a:lumMod val="40000"/>
+                <a:lumOff val="60000"/>
+              </a:schemeClr>
+            </a:solidFill>
+            <a:ln>
+              <a:noFill/>
+            </a:ln>
+          </p:spPr>
+          <p:style>
+            <a:lnRef idx="2">
+              <a:schemeClr val="accent1">
+                <a:lumMod val="75000"/>
+              </a:schemeClr>
+            </a:lnRef>
+            <a:fillRef idx="1">
+              <a:schemeClr val="accent1"/>
+            </a:fillRef>
+            <a:effectRef idx="0">
+              <a:srgbClr val="FFFFFF"/>
+            </a:effectRef>
+            <a:fontRef idx="minor">
+              <a:schemeClr val="lt1"/>
+            </a:fontRef>
+          </p:style>
+          <p:txBody>
+            <a:bodyPr rtlCol="0" anchor="ctr"/>
+            <a:p>
+              <a:pPr algn="ctr"/>
+              <a:endParaRPr lang="zh-CN" altLang="en-US" sz="1000">
+                <a:solidFill>
+                  <a:schemeClr val="tx1"/>
+                </a:solidFill>
+              </a:endParaRPr>
+            </a:p>
+          </p:txBody>
+        </p:sp>
+        <p:sp>
+          <p:nvSpPr>
+            <p:cNvPr id="40" name="文本框 39"/>
+            <p:cNvSpPr txBox="1"/>
+            <p:nvPr/>
+          </p:nvSpPr>
+          <p:spPr>
+            <a:xfrm>
+              <a:off x="3342" y="7579"/>
+              <a:ext cx="2947" cy="419"/>
+            </a:xfrm>
+            <a:prstGeom prst="rect">
+              <a:avLst/>
+            </a:prstGeom>
+            <a:noFill/>
+          </p:spPr>
+          <p:txBody>
+            <a:bodyPr wrap="square" rtlCol="0">
+              <a:noAutofit/>
+            </a:bodyPr>
+            <a:p>
+              <a:r>
+                <a:rPr lang="zh-CN" altLang="en-US" sz="1000" dirty="0"/>
+                <a:t>梯度下降优化器：</a:t>
+              </a:r>
+              <a:r>
+                <a:rPr lang="en-US" altLang="zh-CN" sz="1000" dirty="0">
+                  <a:sym typeface="+mn-ea"/>
+                </a:rPr>
+                <a:t>AdamW</a:t>
+              </a:r>
+              <a:r>
+                <a:rPr lang="zh-CN" altLang="en-US" sz="1000" dirty="0">
+                  <a:sym typeface="+mn-ea"/>
+                </a:rPr>
+                <a:t>方法</a:t>
+              </a:r>
+              <a:endParaRPr lang="zh-CN" altLang="en-US" sz="1000" dirty="0"/>
+            </a:p>
+            <a:p>
+              <a:endParaRPr lang="zh-CN" altLang="en-US" sz="1000" dirty="0"/>
+            </a:p>
+          </p:txBody>
+        </p:sp>
+        <p:sp>
+          <p:nvSpPr>
+            <p:cNvPr id="44" name="文本框 43"/>
+            <p:cNvSpPr txBox="1"/>
+            <p:nvPr/>
+          </p:nvSpPr>
+          <p:spPr>
+            <a:xfrm>
+              <a:off x="3804" y="7998"/>
+              <a:ext cx="2174" cy="916"/>
+            </a:xfrm>
+            <a:prstGeom prst="rect">
+              <a:avLst/>
+            </a:prstGeom>
+            <a:noFill/>
+          </p:spPr>
+          <p:txBody>
+            <a:bodyPr wrap="square" rtlCol="0">
+              <a:noAutofit/>
+            </a:bodyPr>
+            <a:p>
+              <a:r>
+                <a:rPr lang="zh-CN" altLang="en-US" sz="1000" dirty="0"/>
+                <a:t>一阶矩</a:t>
+              </a:r>
+              <a:r>
+                <a:rPr lang="en-US" altLang="zh-CN" sz="1000" dirty="0"/>
+                <a:t> </a:t>
+              </a:r>
+              <a:r>
+                <a:rPr lang="zh-CN" altLang="en-US" sz="1000" dirty="0"/>
+                <a:t>动量法</a:t>
+              </a:r>
+              <a:endParaRPr lang="zh-CN" altLang="en-US" sz="1000" dirty="0"/>
+            </a:p>
+            <a:p>
+              <a:r>
+                <a:rPr lang="zh-CN" altLang="en-US" sz="1000" dirty="0">
+                  <a:sym typeface="+mn-ea"/>
+                </a:rPr>
+                <a:t>二阶矩</a:t>
+              </a:r>
+              <a:r>
+                <a:rPr lang="en-US" altLang="zh-CN" sz="1000" dirty="0">
+                  <a:sym typeface="+mn-ea"/>
+                </a:rPr>
+                <a:t> </a:t>
+              </a:r>
+              <a:r>
+                <a:rPr lang="en-US" altLang="zh-CN" sz="1000" dirty="0"/>
+                <a:t>RMSProp</a:t>
+              </a:r>
+              <a:endParaRPr lang="en-US" altLang="zh-CN" sz="1000" dirty="0"/>
+            </a:p>
+            <a:p>
+              <a:r>
+                <a:rPr lang="en-US" altLang="zh-CN" sz="1000" dirty="0">
+                  <a:sym typeface="+mn-ea"/>
+                </a:rPr>
+                <a:t>L2</a:t>
+              </a:r>
+              <a:r>
+                <a:rPr lang="zh-CN" altLang="en-US" sz="1000" dirty="0">
+                  <a:sym typeface="+mn-ea"/>
+                </a:rPr>
+                <a:t>正则化</a:t>
+              </a:r>
+              <a:endParaRPr lang="zh-CN" altLang="en-US" sz="1000" dirty="0"/>
+            </a:p>
+          </p:txBody>
+        </p:sp>
+      </p:grpSp>
+      <p:sp>
+        <p:nvSpPr>
+          <p:cNvPr id="47" name="右箭头 26"/>
+          <p:cNvSpPr/>
+          <p:nvPr/>
+        </p:nvSpPr>
+        <p:spPr>
+          <a:xfrm>
+            <a:off x="4630420" y="1490345"/>
+            <a:ext cx="2625090" cy="228600"/>
+          </a:xfrm>
+          <a:prstGeom prst="rightArrow">
+            <a:avLst/>
+          </a:prstGeom>
+          <a:ln>
+            <a:noFill/>
+          </a:ln>
+        </p:spPr>
+        <p:style>
+          <a:lnRef idx="2">
+            <a:schemeClr val="accent1">
+              <a:shade val="50000"/>
+            </a:schemeClr>
+          </a:lnRef>
+          <a:fillRef idx="1">
+            <a:schemeClr val="accent1"/>
+          </a:fillRef>
+          <a:effectRef idx="0">
+            <a:schemeClr val="accent1"/>
+          </a:effectRef>
+          <a:fontRef idx="minor">
+            <a:schemeClr val="lt1"/>
+          </a:fontRef>
+        </p:style>
+        <p:txBody>
+          <a:bodyPr rtlCol="0" anchor="ctr"/>
+          <a:p>
+            <a:pPr algn="ctr"/>
+            <a:endParaRPr lang="en-US" altLang="zh-CN" sz="1200"/>
+          </a:p>
+        </p:txBody>
+      </p:sp>
+      <p:sp>
+        <p:nvSpPr>
+          <p:cNvPr id="48" name="圆角矩形 47"/>
+          <p:cNvSpPr/>
+          <p:nvPr/>
+        </p:nvSpPr>
+        <p:spPr>
+          <a:xfrm>
+            <a:off x="5775325" y="1823720"/>
+            <a:ext cx="1480185" cy="533400"/>
+          </a:xfrm>
+          <a:prstGeom prst="roundRect">
+            <a:avLst/>
+          </a:prstGeom>
+          <a:solidFill>
+            <a:schemeClr val="bg1">
+              <a:lumMod val="75000"/>
+            </a:schemeClr>
+          </a:solidFill>
+          <a:ln>
+            <a:noFill/>
+          </a:ln>
+        </p:spPr>
+        <p:style>
+          <a:lnRef idx="2">
+            <a:schemeClr val="accent1">
+              <a:lumMod val="75000"/>
+            </a:schemeClr>
+          </a:lnRef>
+          <a:fillRef idx="1">
+            <a:schemeClr val="accent1"/>
+          </a:fillRef>
+          <a:effectRef idx="0">
+            <a:srgbClr val="FFFFFF"/>
+          </a:effectRef>
+          <a:fontRef idx="minor">
+            <a:schemeClr val="lt1"/>
+          </a:fontRef>
+        </p:style>
+        <p:txBody>
+          <a:bodyPr rtlCol="0" anchor="ctr"/>
+          <a:p>
+            <a:pPr algn="ctr"/>
+            <a:r>
+              <a:rPr lang="zh-CN" altLang="en-US" sz="1000">
+                <a:solidFill>
+                  <a:schemeClr val="tx1"/>
+                </a:solidFill>
+              </a:rPr>
+              <a:t>学习率</a:t>
+            </a:r>
+            <a:r>
+              <a:rPr lang="zh-CN" altLang="en-US" sz="1000">
+                <a:solidFill>
+                  <a:schemeClr val="tx1"/>
+                </a:solidFill>
+              </a:rPr>
+              <a:t>调度器</a:t>
+            </a:r>
+            <a:endParaRPr lang="zh-CN" altLang="en-US" sz="1000">
+              <a:solidFill>
+                <a:schemeClr val="tx1"/>
+              </a:solidFill>
+            </a:endParaRPr>
+          </a:p>
+          <a:p>
+            <a:pPr algn="ctr"/>
+            <a:r>
+              <a:rPr lang="en-US" altLang="zh-CN" sz="1000">
+                <a:solidFill>
+                  <a:schemeClr val="tx1"/>
+                </a:solidFill>
+              </a:rPr>
+              <a:t>wramup + </a:t>
+            </a:r>
+            <a:r>
+              <a:rPr lang="zh-CN" altLang="en-US" sz="1000">
+                <a:solidFill>
+                  <a:schemeClr val="tx1"/>
+                </a:solidFill>
+              </a:rPr>
+              <a:t>余弦退火</a:t>
+            </a:r>
+            <a:endParaRPr lang="en-US" altLang="zh-CN" sz="1000">
+              <a:solidFill>
+                <a:schemeClr val="tx1"/>
+              </a:solidFill>
+            </a:endParaRPr>
+          </a:p>
+        </p:txBody>
+      </p:sp>
+      <p:sp>
+        <p:nvSpPr>
+          <p:cNvPr id="49" name="手杖形箭头 48"/>
+          <p:cNvSpPr/>
+          <p:nvPr/>
+        </p:nvSpPr>
+        <p:spPr>
+          <a:xfrm rot="5400000" flipH="1">
+            <a:off x="8201660" y="3044190"/>
+            <a:ext cx="3802380" cy="735965"/>
+          </a:xfrm>
+          <a:prstGeom prst="uturnArrow">
+            <a:avLst>
+              <a:gd name="adj1" fmla="val 9149"/>
+              <a:gd name="adj2" fmla="val 13093"/>
+              <a:gd name="adj3" fmla="val 13933"/>
+              <a:gd name="adj4" fmla="val 44480"/>
+              <a:gd name="adj5" fmla="val 100000"/>
+            </a:avLst>
+          </a:prstGeom>
+          <a:solidFill>
+            <a:schemeClr val="accent1"/>
+          </a:solidFill>
+          <a:ln>
+            <a:noFill/>
+          </a:ln>
+        </p:spPr>
+        <p:style>
+          <a:lnRef idx="2">
+            <a:schemeClr val="accent1">
+              <a:lumMod val="75000"/>
+            </a:schemeClr>
+          </a:lnRef>
+          <a:fillRef idx="1">
+            <a:schemeClr val="accent1"/>
+          </a:fillRef>
+          <a:effectRef idx="0">
+            <a:srgbClr val="FFFFFF"/>
+          </a:effectRef>
+          <a:fontRef idx="minor">
+            <a:schemeClr val="lt1"/>
+          </a:fontRef>
+        </p:style>
+        <p:txBody>
+          <a:bodyPr rtlCol="0" anchor="ctr"/>
+          <a:p>
+            <a:pPr algn="ctr"/>
+            <a:endParaRPr lang="zh-CN" altLang="en-US">
+              <a:ln>
+                <a:noFill/>
+              </a:ln>
+              <a:solidFill>
+                <a:schemeClr val="tx1"/>
+              </a:solidFill>
+            </a:endParaRPr>
+          </a:p>
+        </p:txBody>
+      </p:sp>
+      <p:sp>
+        <p:nvSpPr>
+          <p:cNvPr id="50" name="文本框 49"/>
+          <p:cNvSpPr txBox="1"/>
+          <p:nvPr/>
+        </p:nvSpPr>
+        <p:spPr>
+          <a:xfrm>
+            <a:off x="10471150" y="3090545"/>
+            <a:ext cx="853440" cy="266065"/>
+          </a:xfrm>
+          <a:prstGeom prst="rect">
+            <a:avLst/>
+          </a:prstGeom>
+          <a:noFill/>
+        </p:spPr>
+        <p:txBody>
+          <a:bodyPr wrap="square" rtlCol="0">
+            <a:noAutofit/>
+          </a:bodyPr>
+          <a:p>
+            <a:r>
+              <a:rPr lang="zh-CN" altLang="en-US" sz="1000" dirty="0"/>
+              <a:t>更新参数</a:t>
+            </a:r>
+            <a:r>
+              <a:rPr lang="zh-CN" altLang="en-US" sz="1000" dirty="0"/>
+              <a:t>值</a:t>
+            </a:r>
+            <a:endParaRPr lang="zh-CN" altLang="en-US" sz="1000" dirty="0"/>
+          </a:p>
+        </p:txBody>
+      </p:sp>
+      <p:sp>
+        <p:nvSpPr>
+          <p:cNvPr id="58" name="文本框 57"/>
+          <p:cNvSpPr txBox="1"/>
+          <p:nvPr/>
+        </p:nvSpPr>
+        <p:spPr>
+          <a:xfrm>
+            <a:off x="6452235" y="5372735"/>
+            <a:ext cx="906780" cy="266065"/>
+          </a:xfrm>
+          <a:prstGeom prst="rect">
+            <a:avLst/>
+          </a:prstGeom>
+          <a:noFill/>
+        </p:spPr>
+        <p:txBody>
+          <a:bodyPr wrap="square" rtlCol="0">
+            <a:noAutofit/>
+          </a:bodyPr>
+          <a:p>
+            <a:r>
+              <a:rPr lang="zh-CN" altLang="en-US" sz="1000" dirty="0"/>
+              <a:t>更新</a:t>
+            </a:r>
+            <a:r>
+              <a:rPr lang="zh-CN" altLang="en-US" sz="1000" dirty="0"/>
+              <a:t>学习率</a:t>
+            </a:r>
+            <a:endParaRPr lang="zh-CN" altLang="en-US" sz="1000" dirty="0"/>
+          </a:p>
+        </p:txBody>
+      </p:sp>
+      <p:sp>
+        <p:nvSpPr>
+          <p:cNvPr id="59" name="文本框 58"/>
+          <p:cNvSpPr txBox="1"/>
+          <p:nvPr/>
+        </p:nvSpPr>
+        <p:spPr>
+          <a:xfrm>
+            <a:off x="4740910" y="1722755"/>
+            <a:ext cx="793750" cy="266065"/>
+          </a:xfrm>
+          <a:prstGeom prst="rect">
+            <a:avLst/>
+          </a:prstGeom>
+          <a:noFill/>
+        </p:spPr>
+        <p:txBody>
+          <a:bodyPr wrap="square" rtlCol="0">
+            <a:noAutofit/>
+          </a:bodyPr>
+          <a:p>
+            <a:r>
+              <a:rPr lang="zh-CN" altLang="en-US" sz="1000" dirty="0"/>
+              <a:t>训练</a:t>
+            </a:r>
+            <a:r>
+              <a:rPr lang="zh-CN" altLang="en-US" sz="1000" dirty="0"/>
+              <a:t>步数</a:t>
+            </a:r>
+            <a:endParaRPr lang="zh-CN" altLang="en-US" sz="1000" dirty="0"/>
+          </a:p>
+        </p:txBody>
+      </p:sp>
+      <p:sp>
+        <p:nvSpPr>
+          <p:cNvPr id="61" name="右箭头 26"/>
+          <p:cNvSpPr/>
+          <p:nvPr/>
+        </p:nvSpPr>
+        <p:spPr>
+          <a:xfrm>
+            <a:off x="4128135" y="3049905"/>
+            <a:ext cx="3204845" cy="228600"/>
+          </a:xfrm>
+          <a:prstGeom prst="rightArrow">
+            <a:avLst/>
+          </a:prstGeom>
+          <a:solidFill>
+            <a:srgbClr val="7030A0"/>
+          </a:solidFill>
+          <a:ln>
+            <a:noFill/>
+          </a:ln>
+        </p:spPr>
+        <p:style>
+          <a:lnRef idx="2">
+            <a:schemeClr val="accent1">
+              <a:shade val="50000"/>
+            </a:schemeClr>
+          </a:lnRef>
+          <a:fillRef idx="1">
+            <a:schemeClr val="accent1"/>
+          </a:fillRef>
+          <a:effectRef idx="0">
+            <a:schemeClr val="accent1"/>
+          </a:effectRef>
+          <a:fontRef idx="minor">
+            <a:schemeClr val="lt1"/>
+          </a:fontRef>
+        </p:style>
+        <p:txBody>
+          <a:bodyPr rtlCol="0" anchor="ctr"/>
+          <a:p>
+            <a:pPr algn="ctr"/>
+            <a:endParaRPr lang="en-US" altLang="zh-CN" sz="1200"/>
+          </a:p>
+        </p:txBody>
+      </p:sp>
+      <p:sp>
+        <p:nvSpPr>
+          <p:cNvPr id="62" name="右箭头 26"/>
+          <p:cNvSpPr/>
+          <p:nvPr/>
+        </p:nvSpPr>
+        <p:spPr>
+          <a:xfrm>
+            <a:off x="4630420" y="1948180"/>
+            <a:ext cx="1072515" cy="228600"/>
+          </a:xfrm>
+          <a:prstGeom prst="rightArrow">
+            <a:avLst/>
+          </a:prstGeom>
+          <a:ln>
+            <a:noFill/>
+          </a:ln>
+        </p:spPr>
+        <p:style>
+          <a:lnRef idx="2">
+            <a:schemeClr val="accent1">
+              <a:shade val="50000"/>
+            </a:schemeClr>
+          </a:lnRef>
+          <a:fillRef idx="1">
+            <a:schemeClr val="accent1"/>
+          </a:fillRef>
+          <a:effectRef idx="0">
+            <a:schemeClr val="accent1"/>
+          </a:effectRef>
+          <a:fontRef idx="minor">
+            <a:schemeClr val="lt1"/>
+          </a:fontRef>
+        </p:style>
+        <p:txBody>
+          <a:bodyPr rtlCol="0" anchor="ctr"/>
+          <a:p>
+            <a:pPr algn="ctr"/>
+            <a:endParaRPr lang="en-US" altLang="zh-CN" sz="1200"/>
+          </a:p>
+        </p:txBody>
+      </p:sp>
+      <p:sp>
+        <p:nvSpPr>
+          <p:cNvPr id="66" name="右箭头 26"/>
+          <p:cNvSpPr/>
+          <p:nvPr/>
+        </p:nvSpPr>
+        <p:spPr>
+          <a:xfrm rot="20220000">
+            <a:off x="4017010" y="4051300"/>
+            <a:ext cx="3482975" cy="228600"/>
+          </a:xfrm>
+          <a:prstGeom prst="rightArrow">
+            <a:avLst/>
+          </a:prstGeom>
+          <a:solidFill>
+            <a:srgbClr val="7030A0"/>
+          </a:solidFill>
+          <a:ln>
+            <a:noFill/>
+          </a:ln>
+        </p:spPr>
+        <p:style>
+          <a:lnRef idx="2">
+            <a:schemeClr val="accent1">
+              <a:shade val="50000"/>
+            </a:schemeClr>
+          </a:lnRef>
+          <a:fillRef idx="1">
+            <a:schemeClr val="accent1"/>
+          </a:fillRef>
+          <a:effectRef idx="0">
+            <a:schemeClr val="accent1"/>
+          </a:effectRef>
+          <a:fontRef idx="minor">
+            <a:schemeClr val="lt1"/>
+          </a:fontRef>
+        </p:style>
+        <p:txBody>
+          <a:bodyPr rtlCol="0" anchor="ctr"/>
+          <a:p>
+            <a:pPr algn="ctr"/>
+            <a:endParaRPr lang="en-US" altLang="zh-CN" sz="1200"/>
+          </a:p>
+        </p:txBody>
+      </p:sp>
+      <p:sp>
+        <p:nvSpPr>
+          <p:cNvPr id="65" name="直角上箭头 64"/>
+          <p:cNvSpPr/>
+          <p:nvPr/>
+        </p:nvSpPr>
+        <p:spPr>
+          <a:xfrm rot="5400000">
+            <a:off x="5662930" y="3627120"/>
+            <a:ext cx="2875280" cy="544830"/>
+          </a:xfrm>
+          <a:prstGeom prst="bentUpArrow">
+            <a:avLst>
+              <a:gd name="adj1" fmla="val 16550"/>
+              <a:gd name="adj2" fmla="val 18065"/>
+              <a:gd name="adj3" fmla="val 24708"/>
+            </a:avLst>
+          </a:prstGeom>
+          <a:ln>
+            <a:noFill/>
+          </a:ln>
+        </p:spPr>
+        <p:style>
+          <a:lnRef idx="2">
+            <a:schemeClr val="accent1">
+              <a:lumMod val="75000"/>
+            </a:schemeClr>
+          </a:lnRef>
+          <a:fillRef idx="1">
+            <a:schemeClr val="accent1"/>
+          </a:fillRef>
+          <a:effectRef idx="0">
+            <a:srgbClr val="FFFFFF"/>
+          </a:effectRef>
+          <a:fontRef idx="minor">
+            <a:schemeClr val="lt1"/>
+          </a:fontRef>
+        </p:style>
+        <p:txBody>
+          <a:bodyPr rtlCol="0" anchor="ctr"/>
+          <a:p>
+            <a:pPr algn="ctr"/>
+            <a:endParaRPr lang="zh-CN" altLang="en-US"/>
+          </a:p>
+        </p:txBody>
+      </p:sp>
+      <p:sp>
+        <p:nvSpPr>
+          <p:cNvPr id="67" name="矩形 66"/>
+          <p:cNvSpPr/>
+          <p:nvPr/>
+        </p:nvSpPr>
+        <p:spPr>
+          <a:xfrm>
+            <a:off x="7455535" y="1177925"/>
+            <a:ext cx="2230120" cy="2708275"/>
+          </a:xfrm>
+          <a:prstGeom prst="rect">
+            <a:avLst/>
+          </a:prstGeom>
+          <a:noFill/>
+          <a:ln w="28575">
+            <a:solidFill>
+              <a:srgbClr val="7030A0"/>
+            </a:solidFill>
+          </a:ln>
+          <a:extLst>
+            <a:ext uri="{909E8E84-426E-40DD-AFC4-6F175D3DCCD1}">
+              <a14:hiddenFill xmlns:a14="http://schemas.microsoft.com/office/drawing/2010/main">
+                <a:solidFill>
+                  <a:schemeClr val="accent1"/>
+                </a:solidFill>
+              </a14:hiddenFill>
+            </a:ext>
+          </a:extLst>
+        </p:spPr>
+        <p:style>
+          <a:lnRef idx="2">
+            <a:schemeClr val="accent1">
+              <a:lumMod val="75000"/>
+            </a:schemeClr>
+          </a:lnRef>
+          <a:fillRef idx="1">
+            <a:schemeClr val="accent1"/>
+          </a:fillRef>
+          <a:effectRef idx="0">
+            <a:srgbClr val="FFFFFF"/>
+          </a:effectRef>
+          <a:fontRef idx="minor">
+            <a:schemeClr val="lt1"/>
+          </a:fontRef>
+        </p:style>
+        <p:txBody>
+          <a:bodyPr rtlCol="0" anchor="ctr"/>
+          <a:p>
+            <a:pPr algn="ctr"/>
+            <a:endParaRPr lang="zh-CN" altLang="en-US"/>
+          </a:p>
+        </p:txBody>
+      </p:sp>
+      <p:sp>
+        <p:nvSpPr>
+          <p:cNvPr id="68" name="文本框 67"/>
+          <p:cNvSpPr txBox="1"/>
+          <p:nvPr/>
+        </p:nvSpPr>
+        <p:spPr>
+          <a:xfrm>
+            <a:off x="5003165" y="2804160"/>
+            <a:ext cx="793750" cy="266065"/>
+          </a:xfrm>
+          <a:prstGeom prst="rect">
+            <a:avLst/>
+          </a:prstGeom>
+          <a:noFill/>
+        </p:spPr>
+        <p:txBody>
+          <a:bodyPr wrap="square" rtlCol="0">
+            <a:noAutofit/>
+          </a:bodyPr>
+          <a:p>
+            <a:r>
+              <a:rPr lang="zh-CN" altLang="en-US" sz="1000" dirty="0"/>
+              <a:t>仅计算</a:t>
+            </a:r>
+            <a:r>
+              <a:rPr lang="en-US" altLang="zh-CN" sz="1000" dirty="0"/>
+              <a:t>Loss</a:t>
+            </a:r>
+            <a:endParaRPr lang="en-US" altLang="zh-CN" sz="1000" dirty="0"/>
+          </a:p>
+        </p:txBody>
+      </p:sp>
+      <p:sp>
+        <p:nvSpPr>
+          <p:cNvPr id="69" name="文本框 68"/>
+          <p:cNvSpPr txBox="1"/>
+          <p:nvPr/>
+        </p:nvSpPr>
+        <p:spPr>
+          <a:xfrm>
+            <a:off x="5003165" y="3790950"/>
+            <a:ext cx="793750" cy="266065"/>
+          </a:xfrm>
+          <a:prstGeom prst="rect">
+            <a:avLst/>
+          </a:prstGeom>
+          <a:noFill/>
+        </p:spPr>
+        <p:txBody>
+          <a:bodyPr wrap="square" rtlCol="0">
+            <a:noAutofit/>
+          </a:bodyPr>
+          <a:p>
+            <a:r>
+              <a:rPr lang="zh-CN" altLang="en-US" sz="1000" dirty="0"/>
+              <a:t>仅计算</a:t>
+            </a:r>
+            <a:r>
+              <a:rPr lang="en-US" altLang="zh-CN" sz="1000" dirty="0"/>
+              <a:t>Loss</a:t>
+            </a:r>
+            <a:endParaRPr lang="en-US" altLang="zh-CN" sz="1000" dirty="0"/>
           </a:p>
         </p:txBody>
       </p:sp>
@@ -18813,4 +21280,263 @@
     </a:ext>
   </a:extLst>
 </a:theme>
+</file>
+
+<file path=ppt/theme/theme2.xml><?xml version="1.0" encoding="utf-8"?>
+<a:theme xmlns:a="http://schemas.openxmlformats.org/drawingml/2006/main" name="Office 主题">
+  <a:themeElements>
+    <a:clrScheme name="Office">
+      <a:dk1>
+        <a:sysClr val="windowText" lastClr="000000"/>
+      </a:dk1>
+      <a:lt1>
+        <a:sysClr val="window" lastClr="FFFFFF"/>
+      </a:lt1>
+      <a:dk2>
+        <a:srgbClr val="44546A"/>
+      </a:dk2>
+      <a:lt2>
+        <a:srgbClr val="E7E6E6"/>
+      </a:lt2>
+      <a:accent1>
+        <a:srgbClr val="5B9BD5"/>
+      </a:accent1>
+      <a:accent2>
+        <a:srgbClr val="ED7D31"/>
+      </a:accent2>
+      <a:accent3>
+        <a:srgbClr val="A5A5A5"/>
+      </a:accent3>
+      <a:accent4>
+        <a:srgbClr val="FFC000"/>
+      </a:accent4>
+      <a:accent5>
+        <a:srgbClr val="4472C4"/>
+      </a:accent5>
+      <a:accent6>
+        <a:srgbClr val="70AD47"/>
+      </a:accent6>
+      <a:hlink>
+        <a:srgbClr val="0563C1"/>
+      </a:hlink>
+      <a:folHlink>
+        <a:srgbClr val="954F72"/>
+      </a:folHlink>
+    </a:clrScheme>
+    <a:fontScheme name="Office">
+      <a:majorFont>
+        <a:latin typeface="Calibri Light"/>
+        <a:ea typeface=""/>
+        <a:cs typeface=""/>
+        <a:font script="Jpan" typeface="ＭＳ Ｐゴシック"/>
+        <a:font script="Hang" typeface="맑은 고딕"/>
+        <a:font script="Hans" typeface="宋体"/>
+        <a:font script="Hant" typeface="新細明體"/>
+        <a:font script="Arab" typeface="Times New Roman"/>
+        <a:font script="Hebr" typeface="Times New Roman"/>
+        <a:font script="Thai" typeface="Angsana New"/>
+        <a:font script="Ethi" typeface="Nyala"/>
+        <a:font script="Beng" typeface="Vrinda"/>
+        <a:font script="Gujr" typeface="Shruti"/>
+        <a:font script="Khmr" typeface="MoolBoran"/>
+        <a:font script="Knda" typeface="Tunga"/>
+        <a:font script="Guru" typeface="Raavi"/>
+        <a:font script="Cans" typeface="Euphemia"/>
+        <a:font script="Cher" typeface="Plantagenet Cherokee"/>
+        <a:font script="Yiii" typeface="Microsoft Yi Baiti"/>
+        <a:font script="Tibt" typeface="Microsoft Himalaya"/>
+        <a:font script="Thaa" typeface="MV Boli"/>
+        <a:font script="Deva" typeface="Mangal"/>
+        <a:font script="Telu" typeface="Gautami"/>
+        <a:font script="Taml" typeface="Latha"/>
+        <a:font script="Syrc" typeface="Estrangelo Edessa"/>
+        <a:font script="Orya" typeface="Kalinga"/>
+        <a:font script="Mlym" typeface="Kartika"/>
+        <a:font script="Laoo" typeface="DokChampa"/>
+        <a:font script="Sinh" typeface="Iskoola Pota"/>
+        <a:font script="Mong" typeface="Mongolian Baiti"/>
+        <a:font script="Viet" typeface="Times New Roman"/>
+        <a:font script="Uigh" typeface="Microsoft Uighur"/>
+        <a:font script="Geor" typeface="Sylfaen"/>
+      </a:majorFont>
+      <a:minorFont>
+        <a:latin typeface="Calibri"/>
+        <a:ea typeface=""/>
+        <a:cs typeface=""/>
+        <a:font script="Jpan" typeface="ＭＳ Ｐゴシック"/>
+        <a:font script="Hang" typeface="맑은 고딕"/>
+        <a:font script="Hans" typeface="宋体"/>
+        <a:font script="Hant" typeface="新細明體"/>
+        <a:font script="Arab" typeface="Arial"/>
+        <a:font script="Hebr" typeface="Arial"/>
+        <a:font script="Thai" typeface="Cordia New"/>
+        <a:font script="Ethi" typeface="Nyala"/>
+        <a:font script="Beng" typeface="Vrinda"/>
+        <a:font script="Gujr" typeface="Shruti"/>
+        <a:font script="Khmr" typeface="DaunPenh"/>
+        <a:font script="Knda" typeface="Tunga"/>
+        <a:font script="Guru" typeface="Raavi"/>
+        <a:font script="Cans" typeface="Euphemia"/>
+        <a:font script="Cher" typeface="Plantagenet Cherokee"/>
+        <a:font script="Yiii" typeface="Microsoft Yi Baiti"/>
+        <a:font script="Tibt" typeface="Microsoft Himalaya"/>
+        <a:font script="Thaa" typeface="MV Boli"/>
+        <a:font script="Deva" typeface="Mangal"/>
+        <a:font script="Telu" typeface="Gautami"/>
+        <a:font script="Taml" typeface="Latha"/>
+        <a:font script="Syrc" typeface="Estrangelo Edessa"/>
+        <a:font script="Orya" typeface="Kalinga"/>
+        <a:font script="Mlym" typeface="Kartika"/>
+        <a:font script="Laoo" typeface="DokChampa"/>
+        <a:font script="Sinh" typeface="Iskoola Pota"/>
+        <a:font script="Mong" typeface="Mongolian Baiti"/>
+        <a:font script="Viet" typeface="Arial"/>
+        <a:font script="Uigh" typeface="Microsoft Uighur"/>
+        <a:font script="Geor" typeface="Sylfaen"/>
+      </a:minorFont>
+    </a:fontScheme>
+    <a:fmtScheme name="Office">
+      <a:fillStyleLst>
+        <a:solidFill>
+          <a:schemeClr val="phClr"/>
+        </a:solidFill>
+        <a:gradFill rotWithShape="1">
+          <a:gsLst>
+            <a:gs pos="0">
+              <a:schemeClr val="phClr">
+                <a:lumMod val="110000"/>
+                <a:satMod val="105000"/>
+                <a:tint val="67000"/>
+              </a:schemeClr>
+            </a:gs>
+            <a:gs pos="50000">
+              <a:schemeClr val="phClr">
+                <a:lumMod val="105000"/>
+                <a:satMod val="103000"/>
+                <a:tint val="73000"/>
+              </a:schemeClr>
+            </a:gs>
+            <a:gs pos="100000">
+              <a:schemeClr val="phClr">
+                <a:lumMod val="105000"/>
+                <a:satMod val="109000"/>
+                <a:tint val="81000"/>
+              </a:schemeClr>
+            </a:gs>
+          </a:gsLst>
+          <a:lin ang="5400000" scaled="0"/>
+        </a:gradFill>
+        <a:gradFill rotWithShape="1">
+          <a:gsLst>
+            <a:gs pos="0">
+              <a:schemeClr val="phClr">
+                <a:satMod val="103000"/>
+                <a:lumMod val="102000"/>
+                <a:tint val="94000"/>
+              </a:schemeClr>
+            </a:gs>
+            <a:gs pos="50000">
+              <a:schemeClr val="phClr">
+                <a:satMod val="110000"/>
+                <a:lumMod val="100000"/>
+                <a:shade val="100000"/>
+              </a:schemeClr>
+            </a:gs>
+            <a:gs pos="100000">
+              <a:schemeClr val="phClr">
+                <a:lumMod val="99000"/>
+                <a:satMod val="120000"/>
+                <a:shade val="78000"/>
+              </a:schemeClr>
+            </a:gs>
+          </a:gsLst>
+          <a:lin ang="5400000" scaled="0"/>
+        </a:gradFill>
+      </a:fillStyleLst>
+      <a:lnStyleLst>
+        <a:ln w="6350" cap="flat" cmpd="sng" algn="ctr">
+          <a:solidFill>
+            <a:schemeClr val="phClr"/>
+          </a:solidFill>
+          <a:prstDash val="solid"/>
+          <a:miter lim="800000"/>
+        </a:ln>
+        <a:ln w="12700" cap="flat" cmpd="sng" algn="ctr">
+          <a:solidFill>
+            <a:schemeClr val="phClr"/>
+          </a:solidFill>
+          <a:prstDash val="solid"/>
+          <a:miter lim="800000"/>
+        </a:ln>
+        <a:ln w="19050" cap="flat" cmpd="sng" algn="ctr">
+          <a:solidFill>
+            <a:schemeClr val="phClr"/>
+          </a:solidFill>
+          <a:prstDash val="solid"/>
+          <a:miter lim="800000"/>
+        </a:ln>
+      </a:lnStyleLst>
+      <a:effectStyleLst>
+        <a:effectStyle>
+          <a:effectLst/>
+        </a:effectStyle>
+        <a:effectStyle>
+          <a:effectLst/>
+        </a:effectStyle>
+        <a:effectStyle>
+          <a:effectLst>
+            <a:outerShdw blurRad="57150" dist="19050" dir="5400000" algn="ctr" rotWithShape="0">
+              <a:srgbClr val="000000">
+                <a:alpha val="63000"/>
+              </a:srgbClr>
+            </a:outerShdw>
+          </a:effectLst>
+        </a:effectStyle>
+      </a:effectStyleLst>
+      <a:bgFillStyleLst>
+        <a:solidFill>
+          <a:schemeClr val="phClr"/>
+        </a:solidFill>
+        <a:solidFill>
+          <a:schemeClr val="phClr">
+            <a:tint val="95000"/>
+            <a:satMod val="170000"/>
+          </a:schemeClr>
+        </a:solidFill>
+        <a:gradFill rotWithShape="1">
+          <a:gsLst>
+            <a:gs pos="0">
+              <a:schemeClr val="phClr">
+                <a:tint val="93000"/>
+                <a:satMod val="150000"/>
+                <a:shade val="98000"/>
+                <a:lumMod val="102000"/>
+              </a:schemeClr>
+            </a:gs>
+            <a:gs pos="50000">
+              <a:schemeClr val="phClr">
+                <a:tint val="98000"/>
+                <a:satMod val="130000"/>
+                <a:shade val="90000"/>
+                <a:lumMod val="103000"/>
+              </a:schemeClr>
+            </a:gs>
+            <a:gs pos="100000">
+              <a:schemeClr val="phClr">
+                <a:shade val="63000"/>
+                <a:satMod val="120000"/>
+              </a:schemeClr>
+            </a:gs>
+          </a:gsLst>
+          <a:lin ang="5400000" scaled="0"/>
+        </a:gradFill>
+      </a:bgFillStyleLst>
+    </a:fmtScheme>
+  </a:themeElements>
+  <a:extLst>
+    <a:ext uri="{05A4C25C-085E-4340-85A3-A5531E510DB2}">
+      <thm15:themeFamily xmlns:thm15="http://schemas.microsoft.com/office/thememl/2012/main" name="Office Theme" id="{62F939B6-93AF-4DB8-9C6B-D6C7DFDC589F}" vid="{4A3C46E8-61CC-4603-A589-7422A47A8E4A}"/>
+    </a:ext>
+  </a:extLst>
+</a:theme>
 </file>